--- a/Presentations/Module_9_UI_Boundaries_Presentation.pptx
+++ b/Presentations/Module_9_UI_Boundaries_Presentation.pptx
@@ -2,23 +2,26 @@
 <file path=ppt/presentation.xml><?xml version="1.0" encoding="utf-8"?>
 <p:presentation xmlns:p="http://schemas.openxmlformats.org/presentationml/2006/main">
   <p:sldMasterIdLst>
-    <p:sldMasterId xmlns:r="http://schemas.openxmlformats.org/officeDocument/2006/relationships" id="2147483648" r:id="R087c57210b354bf5"/>
+    <p:sldMasterId xmlns:r="http://schemas.openxmlformats.org/officeDocument/2006/relationships" id="2147483648" r:id="R1f4ebc0bae0a4bac"/>
   </p:sldMasterIdLst>
   <p:notesMasterIdLst>
-    <p:notesMasterId xmlns:r="http://schemas.openxmlformats.org/officeDocument/2006/relationships" r:id="R85d8bbef8c214b1d"/>
+    <p:notesMasterId xmlns:r="http://schemas.openxmlformats.org/officeDocument/2006/relationships" r:id="R194801db60c0478e"/>
   </p:notesMasterIdLst>
   <p:sldIdLst>
-    <p:sldId xmlns:r="http://schemas.openxmlformats.org/officeDocument/2006/relationships" id="256" r:id="Rf1fbc9b52e00455e"/>
-    <p:sldId xmlns:r="http://schemas.openxmlformats.org/officeDocument/2006/relationships" id="257" r:id="Radf132310da844f8"/>
-    <p:sldId xmlns:r="http://schemas.openxmlformats.org/officeDocument/2006/relationships" id="258" r:id="R2d8ab276610d4b92"/>
-    <p:sldId xmlns:r="http://schemas.openxmlformats.org/officeDocument/2006/relationships" id="259" r:id="Rd5d49f1b26e74168"/>
-    <p:sldId xmlns:r="http://schemas.openxmlformats.org/officeDocument/2006/relationships" id="260" r:id="R3afbfea77d3642a3"/>
-    <p:sldId xmlns:r="http://schemas.openxmlformats.org/officeDocument/2006/relationships" id="261" r:id="R1602d96683f746cb"/>
-    <p:sldId xmlns:r="http://schemas.openxmlformats.org/officeDocument/2006/relationships" id="262" r:id="R3e7a34cd3de54996"/>
-    <p:sldId xmlns:r="http://schemas.openxmlformats.org/officeDocument/2006/relationships" id="263" r:id="R1debcee5ce964d5b"/>
-    <p:sldId xmlns:r="http://schemas.openxmlformats.org/officeDocument/2006/relationships" id="264" r:id="R0b708151ba2a4aee"/>
-    <p:sldId xmlns:r="http://schemas.openxmlformats.org/officeDocument/2006/relationships" id="265" r:id="Rdadd5618168f47d9"/>
-    <p:sldId xmlns:r="http://schemas.openxmlformats.org/officeDocument/2006/relationships" id="266" r:id="R34d8a648a2d64dc9"/>
+    <p:sldId xmlns:r="http://schemas.openxmlformats.org/officeDocument/2006/relationships" id="256" r:id="R37eb9f8912c94d1f"/>
+    <p:sldId xmlns:r="http://schemas.openxmlformats.org/officeDocument/2006/relationships" id="257" r:id="Rcb22b0a3f4784528"/>
+    <p:sldId xmlns:r="http://schemas.openxmlformats.org/officeDocument/2006/relationships" id="258" r:id="Rf1435f4139574b16"/>
+    <p:sldId xmlns:r="http://schemas.openxmlformats.org/officeDocument/2006/relationships" id="259" r:id="R97fadf58ea734901"/>
+    <p:sldId xmlns:r="http://schemas.openxmlformats.org/officeDocument/2006/relationships" id="260" r:id="Ra8f440b27d224df4"/>
+    <p:sldId xmlns:r="http://schemas.openxmlformats.org/officeDocument/2006/relationships" id="261" r:id="R50393c127bc547ab"/>
+    <p:sldId xmlns:r="http://schemas.openxmlformats.org/officeDocument/2006/relationships" id="262" r:id="Ree0756196b2c4fce"/>
+    <p:sldId xmlns:r="http://schemas.openxmlformats.org/officeDocument/2006/relationships" id="263" r:id="Re7694305b23145fb"/>
+    <p:sldId xmlns:r="http://schemas.openxmlformats.org/officeDocument/2006/relationships" id="264" r:id="Rdfdf1eddadf84476"/>
+    <p:sldId xmlns:r="http://schemas.openxmlformats.org/officeDocument/2006/relationships" id="265" r:id="Rda9d765322114882"/>
+    <p:sldId xmlns:r="http://schemas.openxmlformats.org/officeDocument/2006/relationships" id="266" r:id="Rc93a6bd436ef4a28"/>
+    <p:sldId xmlns:r="http://schemas.openxmlformats.org/officeDocument/2006/relationships" id="267" r:id="R474b79f60d334128"/>
+    <p:sldId xmlns:r="http://schemas.openxmlformats.org/officeDocument/2006/relationships" id="268" r:id="Re6159c60427b486b"/>
+    <p:sldId xmlns:r="http://schemas.openxmlformats.org/officeDocument/2006/relationships" id="269" r:id="R2ca2f9c5a97a468b"/>
   </p:sldIdLst>
   <p:sldSz cx="12192000" cy="6858000"/>
   <p:notesSz cx="6858000" cy="9144000"/>
@@ -579,7 +582,7 @@
           <a:lstStyle xmlns:a="http://schemas.openxmlformats.org/drawingml/2006/main"/>
           <a:p xmlns:a="http://schemas.openxmlformats.org/drawingml/2006/main">
             <a:r>
-              <a:t>Introduce Module 9. Open the matching Word tutorial after the exercise overview.</a:t>
+              <a:t>Open the matching Word tutorial after the exercise overview. Source: Module 9 Word tutorial.</a:t>
             </a:r>
           </a:p>
         </p:txBody>
@@ -649,7 +652,7 @@
           <a:lstStyle xmlns:a="http://schemas.openxmlformats.org/drawingml/2006/main"/>
           <a:p xmlns:a="http://schemas.openxmlformats.org/drawingml/2006/main">
             <a:r>
-              <a:t>After tutorial Step 4: run the app or inspect the code. Ask students to explain the observed result. Source: Module 9 Word tutorial.</a:t>
+              <a:t>After tutorial Step 3: run the app or inspect the code. Ask students to explain the observed result. Source: Module 9 Word tutorial.</a:t>
             </a:r>
           </a:p>
         </p:txBody>
@@ -719,7 +722,217 @@
           <a:lstStyle xmlns:a="http://schemas.openxmlformats.org/drawingml/2006/main"/>
           <a:p xmlns:a="http://schemas.openxmlformats.org/drawingml/2006/main">
             <a:r>
+              <a:t>Before tutorial Step 4: explain these concepts. Ask students to predict what the change will do. Then open Step 4 in the Word tutorial. Source: Module 9 Word tutorial. Related MAUI documentation: https://learn.microsoft.com/dotnet/maui/xaml/fundamentals/mvvm</a:t>
+            </a:r>
+          </a:p>
+        </p:txBody>
+      </p:sp>
+      <p:sp>
+        <p:nvSpPr>
+          <p:cNvPr id="4" name="Slide Number Placeholder 3"/>
+          <p:cNvSpPr>
+            <a:spLocks xmlns:a="http://schemas.openxmlformats.org/drawingml/2006/main" noGrp="1"/>
+          </p:cNvSpPr>
+          <p:nvPr>
+            <p:ph type="sldNum" idx="5"/>
+          </p:nvPr>
+        </p:nvSpPr>
+        <p:spPr/>
+        <p:txBody>
+          <a:bodyPr xmlns:a="http://schemas.openxmlformats.org/drawingml/2006/main"/>
+          <a:lstStyle xmlns:a="http://schemas.openxmlformats.org/drawingml/2006/main"/>
+          <a:p xmlns:a="http://schemas.openxmlformats.org/drawingml/2006/main"/>
+        </p:txBody>
+      </p:sp>
+    </p:spTree>
+  </p:cSld>
+  <p:clrMapOvr>
+    <a:masterClrMapping xmlns:a="http://schemas.openxmlformats.org/drawingml/2006/main"/>
+  </p:clrMapOvr>
+</p:notes>
+</file>
+
+<file path=ppt/notesSlides/notesSlide12.xml><?xml version="1.0" encoding="utf-8"?>
+<p:notes xmlns:p="http://schemas.openxmlformats.org/presentationml/2006/main">
+  <p:cSld>
+    <p:spTree>
+      <p:nvGrpSpPr>
+        <p:cNvPr id="1" name=""/>
+        <p:cNvGrpSpPr/>
+        <p:nvPr/>
+      </p:nvGrpSpPr>
+      <p:grpSpPr>
+        <a:xfrm xmlns:a="http://schemas.openxmlformats.org/drawingml/2006/main"/>
+      </p:grpSpPr>
+      <p:sp>
+        <p:nvSpPr>
+          <p:cNvPr id="2" name="Slide Image Placeholder 1"/>
+          <p:cNvSpPr>
+            <a:spLocks xmlns:a="http://schemas.openxmlformats.org/drawingml/2006/main" noGrp="1"/>
+          </p:cNvSpPr>
+          <p:nvPr>
+            <p:ph type="sldImg" idx="0"/>
+          </p:nvPr>
+        </p:nvSpPr>
+        <p:spPr/>
+      </p:sp>
+      <p:sp>
+        <p:nvSpPr>
+          <p:cNvPr id="3" name="Notes Placeholder 2"/>
+          <p:cNvSpPr>
+            <a:spLocks xmlns:a="http://schemas.openxmlformats.org/drawingml/2006/main" noGrp="1"/>
+          </p:cNvSpPr>
+          <p:nvPr>
+            <p:ph type="body" idx="1"/>
+          </p:nvPr>
+        </p:nvSpPr>
+        <p:spPr/>
+        <p:txBody>
+          <a:bodyPr xmlns:a="http://schemas.openxmlformats.org/drawingml/2006/main"/>
+          <a:lstStyle xmlns:a="http://schemas.openxmlformats.org/drawingml/2006/main"/>
+          <a:p xmlns:a="http://schemas.openxmlformats.org/drawingml/2006/main">
+            <a:r>
+              <a:t>After tutorial Step 4: run the app or inspect the code. Ask students to explain the observed result. Source: Module 9 Word tutorial.</a:t>
+            </a:r>
+          </a:p>
+        </p:txBody>
+      </p:sp>
+      <p:sp>
+        <p:nvSpPr>
+          <p:cNvPr id="4" name="Slide Number Placeholder 3"/>
+          <p:cNvSpPr>
+            <a:spLocks xmlns:a="http://schemas.openxmlformats.org/drawingml/2006/main" noGrp="1"/>
+          </p:cNvSpPr>
+          <p:nvPr>
+            <p:ph type="sldNum" idx="5"/>
+          </p:nvPr>
+        </p:nvSpPr>
+        <p:spPr/>
+        <p:txBody>
+          <a:bodyPr xmlns:a="http://schemas.openxmlformats.org/drawingml/2006/main"/>
+          <a:lstStyle xmlns:a="http://schemas.openxmlformats.org/drawingml/2006/main"/>
+          <a:p xmlns:a="http://schemas.openxmlformats.org/drawingml/2006/main"/>
+        </p:txBody>
+      </p:sp>
+    </p:spTree>
+  </p:cSld>
+  <p:clrMapOvr>
+    <a:masterClrMapping xmlns:a="http://schemas.openxmlformats.org/drawingml/2006/main"/>
+  </p:clrMapOvr>
+</p:notes>
+</file>
+
+<file path=ppt/notesSlides/notesSlide13.xml><?xml version="1.0" encoding="utf-8"?>
+<p:notes xmlns:p="http://schemas.openxmlformats.org/presentationml/2006/main">
+  <p:cSld>
+    <p:spTree>
+      <p:nvGrpSpPr>
+        <p:cNvPr id="1" name=""/>
+        <p:cNvGrpSpPr/>
+        <p:nvPr/>
+      </p:nvGrpSpPr>
+      <p:grpSpPr>
+        <a:xfrm xmlns:a="http://schemas.openxmlformats.org/drawingml/2006/main"/>
+      </p:grpSpPr>
+      <p:sp>
+        <p:nvSpPr>
+          <p:cNvPr id="2" name="Slide Image Placeholder 1"/>
+          <p:cNvSpPr>
+            <a:spLocks xmlns:a="http://schemas.openxmlformats.org/drawingml/2006/main" noGrp="1"/>
+          </p:cNvSpPr>
+          <p:nvPr>
+            <p:ph type="sldImg" idx="0"/>
+          </p:nvPr>
+        </p:nvSpPr>
+        <p:spPr/>
+      </p:sp>
+      <p:sp>
+        <p:nvSpPr>
+          <p:cNvPr id="3" name="Notes Placeholder 2"/>
+          <p:cNvSpPr>
+            <a:spLocks xmlns:a="http://schemas.openxmlformats.org/drawingml/2006/main" noGrp="1"/>
+          </p:cNvSpPr>
+          <p:nvPr>
+            <p:ph type="body" idx="1"/>
+          </p:nvPr>
+        </p:nvSpPr>
+        <p:spPr/>
+        <p:txBody>
+          <a:bodyPr xmlns:a="http://schemas.openxmlformats.org/drawingml/2006/main"/>
+          <a:lstStyle xmlns:a="http://schemas.openxmlformats.org/drawingml/2006/main"/>
+          <a:p xmlns:a="http://schemas.openxmlformats.org/drawingml/2006/main">
+            <a:r>
               <a:t>Use the final tutorial checklist. Ask students to explain the module concept without reading code. Source: Module 9 Word tutorial.</a:t>
+            </a:r>
+          </a:p>
+        </p:txBody>
+      </p:sp>
+      <p:sp>
+        <p:nvSpPr>
+          <p:cNvPr id="4" name="Slide Number Placeholder 3"/>
+          <p:cNvSpPr>
+            <a:spLocks xmlns:a="http://schemas.openxmlformats.org/drawingml/2006/main" noGrp="1"/>
+          </p:cNvSpPr>
+          <p:nvPr>
+            <p:ph type="sldNum" idx="5"/>
+          </p:nvPr>
+        </p:nvSpPr>
+        <p:spPr/>
+        <p:txBody>
+          <a:bodyPr xmlns:a="http://schemas.openxmlformats.org/drawingml/2006/main"/>
+          <a:lstStyle xmlns:a="http://schemas.openxmlformats.org/drawingml/2006/main"/>
+          <a:p xmlns:a="http://schemas.openxmlformats.org/drawingml/2006/main"/>
+        </p:txBody>
+      </p:sp>
+    </p:spTree>
+  </p:cSld>
+  <p:clrMapOvr>
+    <a:masterClrMapping xmlns:a="http://schemas.openxmlformats.org/drawingml/2006/main"/>
+  </p:clrMapOvr>
+</p:notes>
+</file>
+
+<file path=ppt/notesSlides/notesSlide14.xml><?xml version="1.0" encoding="utf-8"?>
+<p:notes xmlns:p="http://schemas.openxmlformats.org/presentationml/2006/main">
+  <p:cSld>
+    <p:spTree>
+      <p:nvGrpSpPr>
+        <p:cNvPr id="1" name=""/>
+        <p:cNvGrpSpPr/>
+        <p:nvPr/>
+      </p:nvGrpSpPr>
+      <p:grpSpPr>
+        <a:xfrm xmlns:a="http://schemas.openxmlformats.org/drawingml/2006/main"/>
+      </p:grpSpPr>
+      <p:sp>
+        <p:nvSpPr>
+          <p:cNvPr id="2" name="Slide Image Placeholder 1"/>
+          <p:cNvSpPr>
+            <a:spLocks xmlns:a="http://schemas.openxmlformats.org/drawingml/2006/main" noGrp="1"/>
+          </p:cNvSpPr>
+          <p:nvPr>
+            <p:ph type="sldImg" idx="0"/>
+          </p:nvPr>
+        </p:nvSpPr>
+        <p:spPr/>
+      </p:sp>
+      <p:sp>
+        <p:nvSpPr>
+          <p:cNvPr id="3" name="Notes Placeholder 2"/>
+          <p:cNvSpPr>
+            <a:spLocks xmlns:a="http://schemas.openxmlformats.org/drawingml/2006/main" noGrp="1"/>
+          </p:cNvSpPr>
+          <p:nvPr>
+            <p:ph type="body" idx="1"/>
+          </p:nvPr>
+        </p:nvSpPr>
+        <p:spPr/>
+        <p:txBody>
+          <a:bodyPr xmlns:a="http://schemas.openxmlformats.org/drawingml/2006/main"/>
+          <a:lstStyle xmlns:a="http://schemas.openxmlformats.org/drawingml/2006/main"/>
+          <a:p xmlns:a="http://schemas.openxmlformats.org/drawingml/2006/main">
+            <a:r>
+              <a:t>Student reading: Dependency injection and MVVM. https://learn.microsoft.com/dotnet/maui/xaml/fundamentals/mvvm</a:t>
             </a:r>
           </a:p>
         </p:txBody>
@@ -789,7 +1002,7 @@
           <a:lstStyle xmlns:a="http://schemas.openxmlformats.org/drawingml/2006/main"/>
           <a:p xmlns:a="http://schemas.openxmlformats.org/drawingml/2006/main">
             <a:r>
-              <a:t>Explain the work for Module 9. Show the expected app result before students start. Source: Module 9 Word tutorial.</a:t>
+              <a:t>Give students the outcome before they start. Source: Module 9 Word tutorial.</a:t>
             </a:r>
           </a:p>
         </p:txBody>
@@ -859,7 +1072,7 @@
           <a:lstStyle xmlns:a="http://schemas.openxmlformats.org/drawingml/2006/main"/>
           <a:p xmlns:a="http://schemas.openxmlformats.org/drawingml/2006/main">
             <a:r>
-              <a:t>Before tutorial Step 1: explain these concepts. Ask students to predict what the change will do. Then open Step 1 in the Word tutorial. Source: Module 9 Word tutorial.</a:t>
+              <a:t>Explain the framework idea before the first exercise step. MAUI documentation: https://learn.microsoft.com/dotnet/maui/xaml/fundamentals/mvvm</a:t>
             </a:r>
           </a:p>
         </p:txBody>
@@ -929,7 +1142,7 @@
           <a:lstStyle xmlns:a="http://schemas.openxmlformats.org/drawingml/2006/main"/>
           <a:p xmlns:a="http://schemas.openxmlformats.org/drawingml/2006/main">
             <a:r>
-              <a:t>After tutorial Step 1: run the app or inspect the code. Ask students to explain the observed result. Source: Module 9 Word tutorial.</a:t>
+              <a:t>Ask students to identify the C# object, the XAML control, and the connection between them. Source: Module 9 Word tutorial. MAUI documentation: https://learn.microsoft.com/dotnet/maui/xaml/fundamentals/mvvm</a:t>
             </a:r>
           </a:p>
         </p:txBody>
@@ -999,7 +1212,7 @@
           <a:lstStyle xmlns:a="http://schemas.openxmlformats.org/drawingml/2006/main"/>
           <a:p xmlns:a="http://schemas.openxmlformats.org/drawingml/2006/main">
             <a:r>
-              <a:t>Before tutorial Step 2: explain these concepts. Ask students to predict what the change will do. Then open Step 2 in the Word tutorial. Source: Module 9 Word tutorial.</a:t>
+              <a:t>Before tutorial Step 1: explain these concepts. Ask students to predict what the change will do. Then open Step 1 in the Word tutorial. Source: Module 9 Word tutorial. Related MAUI documentation: https://learn.microsoft.com/dotnet/maui/xaml/fundamentals/mvvm</a:t>
             </a:r>
           </a:p>
         </p:txBody>
@@ -1069,7 +1282,7 @@
           <a:lstStyle xmlns:a="http://schemas.openxmlformats.org/drawingml/2006/main"/>
           <a:p xmlns:a="http://schemas.openxmlformats.org/drawingml/2006/main">
             <a:r>
-              <a:t>After tutorial Step 2: run the app or inspect the code. Ask students to explain the observed result. Source: Module 9 Word tutorial.</a:t>
+              <a:t>After tutorial Step 1: run the app or inspect the code. Ask students to explain the observed result. Source: Module 9 Word tutorial.</a:t>
             </a:r>
           </a:p>
         </p:txBody>
@@ -1139,7 +1352,7 @@
           <a:lstStyle xmlns:a="http://schemas.openxmlformats.org/drawingml/2006/main"/>
           <a:p xmlns:a="http://schemas.openxmlformats.org/drawingml/2006/main">
             <a:r>
-              <a:t>Before tutorial Step 3: explain these concepts. Ask students to predict what the change will do. Then open Step 3 in the Word tutorial. Source: Module 9 Word tutorial.</a:t>
+              <a:t>Before tutorial Step 2: explain these concepts. Ask students to predict what the change will do. Then open Step 2 in the Word tutorial. Source: Module 9 Word tutorial. Related MAUI documentation: https://learn.microsoft.com/dotnet/maui/xaml/fundamentals/mvvm</a:t>
             </a:r>
           </a:p>
         </p:txBody>
@@ -1209,7 +1422,7 @@
           <a:lstStyle xmlns:a="http://schemas.openxmlformats.org/drawingml/2006/main"/>
           <a:p xmlns:a="http://schemas.openxmlformats.org/drawingml/2006/main">
             <a:r>
-              <a:t>After tutorial Step 3: run the app or inspect the code. Ask students to explain the observed result. Source: Module 9 Word tutorial.</a:t>
+              <a:t>After tutorial Step 2: run the app or inspect the code. Ask students to explain the observed result. Source: Module 9 Word tutorial.</a:t>
             </a:r>
           </a:p>
         </p:txBody>
@@ -1279,7 +1492,7 @@
           <a:lstStyle xmlns:a="http://schemas.openxmlformats.org/drawingml/2006/main"/>
           <a:p xmlns:a="http://schemas.openxmlformats.org/drawingml/2006/main">
             <a:r>
-              <a:t>Before tutorial Step 4: explain these concepts. Ask students to predict what the change will do. Then open Step 4 in the Word tutorial. Source: Module 9 Word tutorial.</a:t>
+              <a:t>Before tutorial Step 3: explain these concepts. Ask students to predict what the change will do. Then open Step 3 in the Word tutorial. Source: Module 9 Word tutorial. Related MAUI documentation: https://learn.microsoft.com/dotnet/maui/xaml/fundamentals/mvvm</a:t>
             </a:r>
           </a:p>
         </p:txBody>
@@ -1389,7 +1602,7 @@
           <p:cNvPr id="14" name="Picture 13">
             <a:extLst xmlns:a="http://schemas.openxmlformats.org/drawingml/2006/main">
               <a:ext uri="{FF2B5EF4-FFF2-40B4-BE49-F238E27FC236}">
-                <a16:creationId xmlns:a16="http://schemas.microsoft.com/office/drawing/2014/main" id="{610DC1DD-DBD4-4E4B-885E-986542A80C65}"/>
+                <a16:creationId xmlns:a16="http://schemas.microsoft.com/office/drawing/2014/main" id="{3CCCDBBE-92EF-4760-AA42-719F0B161EB6}"/>
               </a:ext>
             </a:extLst>
           </p:cNvPr>
@@ -1399,7 +1612,7 @@
           <p:nvPr/>
         </p:nvPicPr>
         <p:blipFill>
-          <a:blip xmlns:r="http://schemas.openxmlformats.org/officeDocument/2006/relationships" xmlns:a="http://schemas.openxmlformats.org/drawingml/2006/main" r:embed="R9fbab90d202a46b5">
+          <a:blip xmlns:r="http://schemas.openxmlformats.org/officeDocument/2006/relationships" xmlns:a="http://schemas.openxmlformats.org/drawingml/2006/main" r:embed="Rf4e1f936ea5d47bc">
             <a:alphaModFix amt="40000"/>
           </a:blip>
           <a:stretch xmlns:a="http://schemas.openxmlformats.org/drawingml/2006/main">
@@ -1562,7 +1775,7 @@
           <p:cNvPr id="2" name="Title 1">
             <a:extLst xmlns:a="http://schemas.openxmlformats.org/drawingml/2006/main">
               <a:ext uri="{FF2B5EF4-FFF2-40B4-BE49-F238E27FC236}">
-                <a16:creationId xmlns:a16="http://schemas.microsoft.com/office/drawing/2014/main" id="{0426B72D-CFB8-4FF0-9B32-F13A90628BEE}"/>
+                <a16:creationId xmlns:a16="http://schemas.microsoft.com/office/drawing/2014/main" id="{DB4240F3-DC9D-4F69-B1F3-5D4C735A721B}"/>
               </a:ext>
             </a:extLst>
           </p:cNvPr>
@@ -1609,7 +1822,7 @@
           <p:cNvPr id="3" name="Subtitle 2">
             <a:extLst xmlns:a="http://schemas.openxmlformats.org/drawingml/2006/main">
               <a:ext uri="{FF2B5EF4-FFF2-40B4-BE49-F238E27FC236}">
-                <a16:creationId xmlns:a16="http://schemas.microsoft.com/office/drawing/2014/main" id="{9240B1B9-40C8-4087-B91A-6B3F0BBC9B7A}"/>
+                <a16:creationId xmlns:a16="http://schemas.microsoft.com/office/drawing/2014/main" id="{CD8E1BB7-8027-4D29-9E15-5F9B96B81E47}"/>
               </a:ext>
             </a:extLst>
           </p:cNvPr>
@@ -1737,7 +1950,7 @@
           <p:cNvPr id="4" name="Date Placeholder 3">
             <a:extLst xmlns:a="http://schemas.openxmlformats.org/drawingml/2006/main">
               <a:ext uri="{FF2B5EF4-FFF2-40B4-BE49-F238E27FC236}">
-                <a16:creationId xmlns:a16="http://schemas.microsoft.com/office/drawing/2014/main" id="{B68572E6-B993-43BA-8300-31BA4B3CDB3C}"/>
+                <a16:creationId xmlns:a16="http://schemas.microsoft.com/office/drawing/2014/main" id="{0E002832-88A1-411D-A37F-5F0C1EA4F6EA}"/>
               </a:ext>
             </a:extLst>
           </p:cNvPr>
@@ -1765,7 +1978,7 @@
           <p:cNvPr id="5" name="Footer Placeholder 4">
             <a:extLst xmlns:a="http://schemas.openxmlformats.org/drawingml/2006/main">
               <a:ext uri="{FF2B5EF4-FFF2-40B4-BE49-F238E27FC236}">
-                <a16:creationId xmlns:a16="http://schemas.microsoft.com/office/drawing/2014/main" id="{67E0FFB7-69CE-488D-9857-4CBA109E04EE}"/>
+                <a16:creationId xmlns:a16="http://schemas.microsoft.com/office/drawing/2014/main" id="{3032130C-6F8E-45AD-B129-CA7CAB410BCE}"/>
               </a:ext>
             </a:extLst>
           </p:cNvPr>
@@ -1790,7 +2003,7 @@
           <p:cNvPr id="6" name="Slide Number Placeholder 5">
             <a:extLst xmlns:a="http://schemas.openxmlformats.org/drawingml/2006/main">
               <a:ext uri="{FF2B5EF4-FFF2-40B4-BE49-F238E27FC236}">
-                <a16:creationId xmlns:a16="http://schemas.microsoft.com/office/drawing/2014/main" id="{95282BE4-B947-480E-B86C-BD14B02C8E22}"/>
+                <a16:creationId xmlns:a16="http://schemas.microsoft.com/office/drawing/2014/main" id="{EC5FE587-48A3-4499-8833-ED085749D766}"/>
               </a:ext>
             </a:extLst>
           </p:cNvPr>
@@ -1889,7 +2102,7 @@
           <p:cNvPr id="2" name="Title 1">
             <a:extLst xmlns:a="http://schemas.openxmlformats.org/drawingml/2006/main">
               <a:ext uri="{FF2B5EF4-FFF2-40B4-BE49-F238E27FC236}">
-                <a16:creationId xmlns:a16="http://schemas.microsoft.com/office/drawing/2014/main" id="{B9B4830B-E5BD-4C8D-99DA-2C7338665D73}"/>
+                <a16:creationId xmlns:a16="http://schemas.microsoft.com/office/drawing/2014/main" id="{CD1238EA-9360-4066-833C-D11752A2259F}"/>
               </a:ext>
             </a:extLst>
           </p:cNvPr>
@@ -1916,7 +2129,7 @@
           <p:cNvPr id="3" name="Vertical Text Placeholder 2">
             <a:extLst xmlns:a="http://schemas.openxmlformats.org/drawingml/2006/main">
               <a:ext uri="{FF2B5EF4-FFF2-40B4-BE49-F238E27FC236}">
-                <a16:creationId xmlns:a16="http://schemas.microsoft.com/office/drawing/2014/main" id="{C5C58BC7-7596-4518-946A-EAAFF49F0029}"/>
+                <a16:creationId xmlns:a16="http://schemas.microsoft.com/office/drawing/2014/main" id="{03BA187C-C99F-4F59-AED9-E6A6E4C81758}"/>
               </a:ext>
             </a:extLst>
           </p:cNvPr>
@@ -1978,7 +2191,7 @@
           <p:cNvPr id="4" name="Date Placeholder 3">
             <a:extLst xmlns:a="http://schemas.openxmlformats.org/drawingml/2006/main">
               <a:ext uri="{FF2B5EF4-FFF2-40B4-BE49-F238E27FC236}">
-                <a16:creationId xmlns:a16="http://schemas.microsoft.com/office/drawing/2014/main" id="{33BD9EDB-4978-44E5-8AC2-F07F53A4CBD9}"/>
+                <a16:creationId xmlns:a16="http://schemas.microsoft.com/office/drawing/2014/main" id="{127E8B4E-9B4C-48EA-9A3E-503BC9BAF256}"/>
               </a:ext>
             </a:extLst>
           </p:cNvPr>
@@ -2006,7 +2219,7 @@
           <p:cNvPr id="5" name="Footer Placeholder 4">
             <a:extLst xmlns:a="http://schemas.openxmlformats.org/drawingml/2006/main">
               <a:ext uri="{FF2B5EF4-FFF2-40B4-BE49-F238E27FC236}">
-                <a16:creationId xmlns:a16="http://schemas.microsoft.com/office/drawing/2014/main" id="{22A57025-64AE-4BF4-AE5B-3B3270F7C74E}"/>
+                <a16:creationId xmlns:a16="http://schemas.microsoft.com/office/drawing/2014/main" id="{FDA05AE2-C77C-438F-AF8F-E7AA91823D2F}"/>
               </a:ext>
             </a:extLst>
           </p:cNvPr>
@@ -2031,7 +2244,7 @@
           <p:cNvPr id="6" name="Slide Number Placeholder 5">
             <a:extLst xmlns:a="http://schemas.openxmlformats.org/drawingml/2006/main">
               <a:ext uri="{FF2B5EF4-FFF2-40B4-BE49-F238E27FC236}">
-                <a16:creationId xmlns:a16="http://schemas.microsoft.com/office/drawing/2014/main" id="{D89A4F25-9154-40ED-B9D2-BC0636C3080E}"/>
+                <a16:creationId xmlns:a16="http://schemas.microsoft.com/office/drawing/2014/main" id="{978F9F90-C11B-45DC-A563-43DA98154CD9}"/>
               </a:ext>
             </a:extLst>
           </p:cNvPr>
@@ -2076,7 +2289,7 @@
           <p:cNvPr id="2" name="Vertical Title 1">
             <a:extLst xmlns:a="http://schemas.openxmlformats.org/drawingml/2006/main">
               <a:ext uri="{FF2B5EF4-FFF2-40B4-BE49-F238E27FC236}">
-                <a16:creationId xmlns:a16="http://schemas.microsoft.com/office/drawing/2014/main" id="{84093F26-C886-49CB-B8AF-E10D28336721}"/>
+                <a16:creationId xmlns:a16="http://schemas.microsoft.com/office/drawing/2014/main" id="{E9BCC4B4-6E46-4E50-B3B2-87EC94B5FC81}"/>
               </a:ext>
             </a:extLst>
           </p:cNvPr>
@@ -2108,7 +2321,7 @@
           <p:cNvPr id="3" name="Vertical Text Placeholder 2">
             <a:extLst xmlns:a="http://schemas.openxmlformats.org/drawingml/2006/main">
               <a:ext uri="{FF2B5EF4-FFF2-40B4-BE49-F238E27FC236}">
-                <a16:creationId xmlns:a16="http://schemas.microsoft.com/office/drawing/2014/main" id="{D0B20D25-9B11-40D5-8530-1C0381A98672}"/>
+                <a16:creationId xmlns:a16="http://schemas.microsoft.com/office/drawing/2014/main" id="{F1705063-0DAF-4494-A645-E4C87E3FC8A2}"/>
               </a:ext>
             </a:extLst>
           </p:cNvPr>
@@ -2175,7 +2388,7 @@
           <p:cNvPr id="4" name="Date Placeholder 3">
             <a:extLst xmlns:a="http://schemas.openxmlformats.org/drawingml/2006/main">
               <a:ext uri="{FF2B5EF4-FFF2-40B4-BE49-F238E27FC236}">
-                <a16:creationId xmlns:a16="http://schemas.microsoft.com/office/drawing/2014/main" id="{80DF73F1-8804-4CC5-BD20-0B915B34DD06}"/>
+                <a16:creationId xmlns:a16="http://schemas.microsoft.com/office/drawing/2014/main" id="{44782D51-96E2-4277-8802-10A355647FFD}"/>
               </a:ext>
             </a:extLst>
           </p:cNvPr>
@@ -2203,7 +2416,7 @@
           <p:cNvPr id="5" name="Footer Placeholder 4">
             <a:extLst xmlns:a="http://schemas.openxmlformats.org/drawingml/2006/main">
               <a:ext uri="{FF2B5EF4-FFF2-40B4-BE49-F238E27FC236}">
-                <a16:creationId xmlns:a16="http://schemas.microsoft.com/office/drawing/2014/main" id="{9F1E6D90-3E06-4161-A48D-7E9FBD7C7A97}"/>
+                <a16:creationId xmlns:a16="http://schemas.microsoft.com/office/drawing/2014/main" id="{9BE468F7-62C4-44D9-A7A8-459B926A8A4F}"/>
               </a:ext>
             </a:extLst>
           </p:cNvPr>
@@ -2228,7 +2441,7 @@
           <p:cNvPr id="6" name="Slide Number Placeholder 5">
             <a:extLst xmlns:a="http://schemas.openxmlformats.org/drawingml/2006/main">
               <a:ext uri="{FF2B5EF4-FFF2-40B4-BE49-F238E27FC236}">
-                <a16:creationId xmlns:a16="http://schemas.microsoft.com/office/drawing/2014/main" id="{9B8C857D-6C6D-4C73-80D9-EE0A8F18B860}"/>
+                <a16:creationId xmlns:a16="http://schemas.microsoft.com/office/drawing/2014/main" id="{45056F37-EF0E-4EE8-8AD3-5514321BDDC0}"/>
               </a:ext>
             </a:extLst>
           </p:cNvPr>
@@ -2273,7 +2486,7 @@
           <p:cNvPr id="3" name="Content Placeholder 2">
             <a:extLst xmlns:a="http://schemas.openxmlformats.org/drawingml/2006/main">
               <a:ext uri="{FF2B5EF4-FFF2-40B4-BE49-F238E27FC236}">
-                <a16:creationId xmlns:a16="http://schemas.microsoft.com/office/drawing/2014/main" id="{9FBA7D2B-DF81-41E9-BF8B-BE74A34B332E}"/>
+                <a16:creationId xmlns:a16="http://schemas.microsoft.com/office/drawing/2014/main" id="{F3E722BD-2581-4903-B938-1D9C34BFD9C8}"/>
               </a:ext>
             </a:extLst>
           </p:cNvPr>
@@ -2336,7 +2549,7 @@
           <p:cNvPr id="4" name="Date Placeholder 3">
             <a:extLst xmlns:a="http://schemas.openxmlformats.org/drawingml/2006/main">
               <a:ext uri="{FF2B5EF4-FFF2-40B4-BE49-F238E27FC236}">
-                <a16:creationId xmlns:a16="http://schemas.microsoft.com/office/drawing/2014/main" id="{1D2EB51B-CA7C-453B-8689-536E6AD48049}"/>
+                <a16:creationId xmlns:a16="http://schemas.microsoft.com/office/drawing/2014/main" id="{41A4BFF4-2F24-4ADC-A4AC-8490ACD1D617}"/>
               </a:ext>
             </a:extLst>
           </p:cNvPr>
@@ -2364,7 +2577,7 @@
           <p:cNvPr id="5" name="Footer Placeholder 4">
             <a:extLst xmlns:a="http://schemas.openxmlformats.org/drawingml/2006/main">
               <a:ext uri="{FF2B5EF4-FFF2-40B4-BE49-F238E27FC236}">
-                <a16:creationId xmlns:a16="http://schemas.microsoft.com/office/drawing/2014/main" id="{C731EF41-F949-4100-AACF-F0DC39D0B00B}"/>
+                <a16:creationId xmlns:a16="http://schemas.microsoft.com/office/drawing/2014/main" id="{94D2B964-B222-467D-9055-738D30E29567}"/>
               </a:ext>
             </a:extLst>
           </p:cNvPr>
@@ -2389,7 +2602,7 @@
           <p:cNvPr id="6" name="Slide Number Placeholder 5">
             <a:extLst xmlns:a="http://schemas.openxmlformats.org/drawingml/2006/main">
               <a:ext uri="{FF2B5EF4-FFF2-40B4-BE49-F238E27FC236}">
-                <a16:creationId xmlns:a16="http://schemas.microsoft.com/office/drawing/2014/main" id="{612E0339-AE66-4EA6-8578-83F32F6DB75C}"/>
+                <a16:creationId xmlns:a16="http://schemas.microsoft.com/office/drawing/2014/main" id="{A337ABCB-B776-4A2A-A862-CFA68685B7C7}"/>
               </a:ext>
             </a:extLst>
           </p:cNvPr>
@@ -2477,7 +2690,7 @@
           <p:cNvPr id="2" name="Title 1">
             <a:extLst xmlns:a="http://schemas.openxmlformats.org/drawingml/2006/main">
               <a:ext uri="{FF2B5EF4-FFF2-40B4-BE49-F238E27FC236}">
-                <a16:creationId xmlns:a16="http://schemas.microsoft.com/office/drawing/2014/main" id="{6E9BA783-2140-4F34-9A44-3EE2932F6CE4}"/>
+                <a16:creationId xmlns:a16="http://schemas.microsoft.com/office/drawing/2014/main" id="{721F3E00-258C-47FD-ACFF-E0BA0E5DCBF0}"/>
               </a:ext>
             </a:extLst>
           </p:cNvPr>
@@ -2515,7 +2728,7 @@
           <p:cNvPr id="3" name="Text Placeholder 2">
             <a:extLst xmlns:a="http://schemas.openxmlformats.org/drawingml/2006/main">
               <a:ext uri="{FF2B5EF4-FFF2-40B4-BE49-F238E27FC236}">
-                <a16:creationId xmlns:a16="http://schemas.microsoft.com/office/drawing/2014/main" id="{C199B30E-25B4-445A-ABD0-FC4E27B94365}"/>
+                <a16:creationId xmlns:a16="http://schemas.microsoft.com/office/drawing/2014/main" id="{A73EE6D3-37F7-4657-B828-FFCB6912A7AA}"/>
               </a:ext>
             </a:extLst>
           </p:cNvPr>
@@ -2641,7 +2854,7 @@
           <p:cNvPr id="4" name="Date Placeholder 3">
             <a:extLst xmlns:a="http://schemas.openxmlformats.org/drawingml/2006/main">
               <a:ext uri="{FF2B5EF4-FFF2-40B4-BE49-F238E27FC236}">
-                <a16:creationId xmlns:a16="http://schemas.microsoft.com/office/drawing/2014/main" id="{EA9B5CD9-FF07-4387-BC06-9F60CF96B7EC}"/>
+                <a16:creationId xmlns:a16="http://schemas.microsoft.com/office/drawing/2014/main" id="{36E7F10A-8BCA-43F8-AA20-E4610A5AB963}"/>
               </a:ext>
             </a:extLst>
           </p:cNvPr>
@@ -2669,7 +2882,7 @@
           <p:cNvPr id="5" name="Footer Placeholder 4">
             <a:extLst xmlns:a="http://schemas.openxmlformats.org/drawingml/2006/main">
               <a:ext uri="{FF2B5EF4-FFF2-40B4-BE49-F238E27FC236}">
-                <a16:creationId xmlns:a16="http://schemas.microsoft.com/office/drawing/2014/main" id="{48ADC1FA-0F57-4C6D-A1F1-F852A8E71F07}"/>
+                <a16:creationId xmlns:a16="http://schemas.microsoft.com/office/drawing/2014/main" id="{5961968F-A701-49E0-A638-174871138A78}"/>
               </a:ext>
             </a:extLst>
           </p:cNvPr>
@@ -2694,7 +2907,7 @@
           <p:cNvPr id="6" name="Slide Number Placeholder 5">
             <a:extLst xmlns:a="http://schemas.openxmlformats.org/drawingml/2006/main">
               <a:ext uri="{FF2B5EF4-FFF2-40B4-BE49-F238E27FC236}">
-                <a16:creationId xmlns:a16="http://schemas.microsoft.com/office/drawing/2014/main" id="{AF5A8827-31F6-44A2-8EE7-D15C018E2270}"/>
+                <a16:creationId xmlns:a16="http://schemas.microsoft.com/office/drawing/2014/main" id="{EF0E47C8-865A-4DAF-915F-19B8D8702139}"/>
               </a:ext>
             </a:extLst>
           </p:cNvPr>
@@ -2739,7 +2952,7 @@
           <p:cNvPr id="2" name="Title 1">
             <a:extLst xmlns:a="http://schemas.openxmlformats.org/drawingml/2006/main">
               <a:ext uri="{FF2B5EF4-FFF2-40B4-BE49-F238E27FC236}">
-                <a16:creationId xmlns:a16="http://schemas.microsoft.com/office/drawing/2014/main" id="{0FF53078-E27C-4CD0-B03B-0A8E15EF2AA4}"/>
+                <a16:creationId xmlns:a16="http://schemas.microsoft.com/office/drawing/2014/main" id="{7EFBC9DA-5B9E-47D5-BDC4-1B47D01DB41A}"/>
               </a:ext>
             </a:extLst>
           </p:cNvPr>
@@ -2766,7 +2979,7 @@
           <p:cNvPr id="3" name="Content Placeholder 2">
             <a:extLst xmlns:a="http://schemas.openxmlformats.org/drawingml/2006/main">
               <a:ext uri="{FF2B5EF4-FFF2-40B4-BE49-F238E27FC236}">
-                <a16:creationId xmlns:a16="http://schemas.microsoft.com/office/drawing/2014/main" id="{750F9A63-D453-4328-95BE-9A109F6F2394}"/>
+                <a16:creationId xmlns:a16="http://schemas.microsoft.com/office/drawing/2014/main" id="{9282E617-964F-4BAA-BE0F-FB5B8302A12B}"/>
               </a:ext>
             </a:extLst>
           </p:cNvPr>
@@ -2871,7 +3084,7 @@
           <p:cNvPr id="4" name="Content Placeholder 3">
             <a:extLst xmlns:a="http://schemas.openxmlformats.org/drawingml/2006/main">
               <a:ext uri="{FF2B5EF4-FFF2-40B4-BE49-F238E27FC236}">
-                <a16:creationId xmlns:a16="http://schemas.microsoft.com/office/drawing/2014/main" id="{BF7F6ABA-EA83-4648-B8BC-2DD82430299B}"/>
+                <a16:creationId xmlns:a16="http://schemas.microsoft.com/office/drawing/2014/main" id="{203AE905-B137-44AD-AA72-3BE91DC9D18E}"/>
               </a:ext>
             </a:extLst>
           </p:cNvPr>
@@ -2976,7 +3189,7 @@
           <p:cNvPr id="5" name="Date Placeholder 4">
             <a:extLst xmlns:a="http://schemas.openxmlformats.org/drawingml/2006/main">
               <a:ext uri="{FF2B5EF4-FFF2-40B4-BE49-F238E27FC236}">
-                <a16:creationId xmlns:a16="http://schemas.microsoft.com/office/drawing/2014/main" id="{4CBB6683-2E17-4404-89B8-D7A88D05CDD4}"/>
+                <a16:creationId xmlns:a16="http://schemas.microsoft.com/office/drawing/2014/main" id="{77763734-DCA6-4BF2-AD37-30BC07075C13}"/>
               </a:ext>
             </a:extLst>
           </p:cNvPr>
@@ -3004,7 +3217,7 @@
           <p:cNvPr id="6" name="Footer Placeholder 5">
             <a:extLst xmlns:a="http://schemas.openxmlformats.org/drawingml/2006/main">
               <a:ext uri="{FF2B5EF4-FFF2-40B4-BE49-F238E27FC236}">
-                <a16:creationId xmlns:a16="http://schemas.microsoft.com/office/drawing/2014/main" id="{A5674490-7A53-47B5-9A31-7C2C0ADD83F9}"/>
+                <a16:creationId xmlns:a16="http://schemas.microsoft.com/office/drawing/2014/main" id="{C5CD7CB9-5933-4CAD-9E50-AB79B4510674}"/>
               </a:ext>
             </a:extLst>
           </p:cNvPr>
@@ -3029,7 +3242,7 @@
           <p:cNvPr id="7" name="Slide Number Placeholder 6">
             <a:extLst xmlns:a="http://schemas.openxmlformats.org/drawingml/2006/main">
               <a:ext uri="{FF2B5EF4-FFF2-40B4-BE49-F238E27FC236}">
-                <a16:creationId xmlns:a16="http://schemas.microsoft.com/office/drawing/2014/main" id="{C4E4EE76-667C-47C9-892E-3CAF8539922B}"/>
+                <a16:creationId xmlns:a16="http://schemas.microsoft.com/office/drawing/2014/main" id="{1893FFF6-D77C-4086-88D3-C11656E48598}"/>
               </a:ext>
             </a:extLst>
           </p:cNvPr>
@@ -3074,7 +3287,7 @@
           <p:cNvPr id="2" name="Title 1">
             <a:extLst xmlns:a="http://schemas.openxmlformats.org/drawingml/2006/main">
               <a:ext uri="{FF2B5EF4-FFF2-40B4-BE49-F238E27FC236}">
-                <a16:creationId xmlns:a16="http://schemas.microsoft.com/office/drawing/2014/main" id="{7FF5674D-6EE7-4BA6-A1A0-8CFCEFBC9CC1}"/>
+                <a16:creationId xmlns:a16="http://schemas.microsoft.com/office/drawing/2014/main" id="{8EA25584-5737-474C-984B-D1D318E9F167}"/>
               </a:ext>
             </a:extLst>
           </p:cNvPr>
@@ -3106,7 +3319,7 @@
           <p:cNvPr id="3" name="Text Placeholder 2">
             <a:extLst xmlns:a="http://schemas.openxmlformats.org/drawingml/2006/main">
               <a:ext uri="{FF2B5EF4-FFF2-40B4-BE49-F238E27FC236}">
-                <a16:creationId xmlns:a16="http://schemas.microsoft.com/office/drawing/2014/main" id="{D0593A76-9B46-49DF-82CF-7AD7D3AA77EE}"/>
+                <a16:creationId xmlns:a16="http://schemas.microsoft.com/office/drawing/2014/main" id="{4263AA12-AD1E-46EB-A855-82C50FC58EA1}"/>
               </a:ext>
             </a:extLst>
           </p:cNvPr>
@@ -3178,7 +3391,7 @@
           <p:cNvPr id="4" name="Content Placeholder 3">
             <a:extLst xmlns:a="http://schemas.openxmlformats.org/drawingml/2006/main">
               <a:ext uri="{FF2B5EF4-FFF2-40B4-BE49-F238E27FC236}">
-                <a16:creationId xmlns:a16="http://schemas.microsoft.com/office/drawing/2014/main" id="{40DB8E38-E22E-45AD-94C0-26123C9A245E}"/>
+                <a16:creationId xmlns:a16="http://schemas.microsoft.com/office/drawing/2014/main" id="{97888758-1454-48A7-819E-7EB0B8658234}"/>
               </a:ext>
             </a:extLst>
           </p:cNvPr>
@@ -3282,7 +3495,7 @@
           <p:cNvPr id="5" name="Text Placeholder 4">
             <a:extLst xmlns:a="http://schemas.openxmlformats.org/drawingml/2006/main">
               <a:ext uri="{FF2B5EF4-FFF2-40B4-BE49-F238E27FC236}">
-                <a16:creationId xmlns:a16="http://schemas.microsoft.com/office/drawing/2014/main" id="{1EE459E0-64D3-4EC3-97CB-06F1B751CE0B}"/>
+                <a16:creationId xmlns:a16="http://schemas.microsoft.com/office/drawing/2014/main" id="{4F5337B7-D318-454D-AE3C-409DCE3DD26F}"/>
               </a:ext>
             </a:extLst>
           </p:cNvPr>
@@ -3354,7 +3567,7 @@
           <p:cNvPr id="6" name="Content Placeholder 5">
             <a:extLst xmlns:a="http://schemas.openxmlformats.org/drawingml/2006/main">
               <a:ext uri="{FF2B5EF4-FFF2-40B4-BE49-F238E27FC236}">
-                <a16:creationId xmlns:a16="http://schemas.microsoft.com/office/drawing/2014/main" id="{3AF16AF8-8003-42AF-A86F-E9CB908E3BA4}"/>
+                <a16:creationId xmlns:a16="http://schemas.microsoft.com/office/drawing/2014/main" id="{87ABC5C4-1F7A-414C-86E9-29CED79FC8DD}"/>
               </a:ext>
             </a:extLst>
           </p:cNvPr>
@@ -3458,7 +3671,7 @@
           <p:cNvPr id="7" name="Date Placeholder 6">
             <a:extLst xmlns:a="http://schemas.openxmlformats.org/drawingml/2006/main">
               <a:ext uri="{FF2B5EF4-FFF2-40B4-BE49-F238E27FC236}">
-                <a16:creationId xmlns:a16="http://schemas.microsoft.com/office/drawing/2014/main" id="{CAB10225-00BD-4E20-A624-7B1B7301AC69}"/>
+                <a16:creationId xmlns:a16="http://schemas.microsoft.com/office/drawing/2014/main" id="{339F2F58-B277-4349-A55F-CA4AE03FF39D}"/>
               </a:ext>
             </a:extLst>
           </p:cNvPr>
@@ -3486,7 +3699,7 @@
           <p:cNvPr id="8" name="Footer Placeholder 7">
             <a:extLst xmlns:a="http://schemas.openxmlformats.org/drawingml/2006/main">
               <a:ext uri="{FF2B5EF4-FFF2-40B4-BE49-F238E27FC236}">
-                <a16:creationId xmlns:a16="http://schemas.microsoft.com/office/drawing/2014/main" id="{FBF5A2C2-B96C-47F3-B702-EC448BE5C63E}"/>
+                <a16:creationId xmlns:a16="http://schemas.microsoft.com/office/drawing/2014/main" id="{78441BB4-49F2-4A4E-A0D6-E3B629BF9431}"/>
               </a:ext>
             </a:extLst>
           </p:cNvPr>
@@ -3511,7 +3724,7 @@
           <p:cNvPr id="9" name="Slide Number Placeholder 8">
             <a:extLst xmlns:a="http://schemas.openxmlformats.org/drawingml/2006/main">
               <a:ext uri="{FF2B5EF4-FFF2-40B4-BE49-F238E27FC236}">
-                <a16:creationId xmlns:a16="http://schemas.microsoft.com/office/drawing/2014/main" id="{20DC55D5-F90A-40A2-9352-9AC0EE4403F1}"/>
+                <a16:creationId xmlns:a16="http://schemas.microsoft.com/office/drawing/2014/main" id="{96EE9829-154C-43C9-913E-6851076D9B67}"/>
               </a:ext>
             </a:extLst>
           </p:cNvPr>
@@ -3556,7 +3769,7 @@
           <p:cNvPr id="2" name="Title 1">
             <a:extLst xmlns:a="http://schemas.openxmlformats.org/drawingml/2006/main">
               <a:ext uri="{FF2B5EF4-FFF2-40B4-BE49-F238E27FC236}">
-                <a16:creationId xmlns:a16="http://schemas.microsoft.com/office/drawing/2014/main" id="{1F5F71A8-197F-42BF-A1DE-776DD30E3B7B}"/>
+                <a16:creationId xmlns:a16="http://schemas.microsoft.com/office/drawing/2014/main" id="{FFEA56E9-F7AF-4F9F-A067-0459C336C37C}"/>
               </a:ext>
             </a:extLst>
           </p:cNvPr>
@@ -3583,7 +3796,7 @@
           <p:cNvPr id="3" name="Date Placeholder 2">
             <a:extLst xmlns:a="http://schemas.openxmlformats.org/drawingml/2006/main">
               <a:ext uri="{FF2B5EF4-FFF2-40B4-BE49-F238E27FC236}">
-                <a16:creationId xmlns:a16="http://schemas.microsoft.com/office/drawing/2014/main" id="{03F008A9-CD5D-4EA4-9BEF-AB57B90DF06A}"/>
+                <a16:creationId xmlns:a16="http://schemas.microsoft.com/office/drawing/2014/main" id="{F277B79B-B2D2-4A44-98D4-020B151C9673}"/>
               </a:ext>
             </a:extLst>
           </p:cNvPr>
@@ -3611,7 +3824,7 @@
           <p:cNvPr id="4" name="Footer Placeholder 3">
             <a:extLst xmlns:a="http://schemas.openxmlformats.org/drawingml/2006/main">
               <a:ext uri="{FF2B5EF4-FFF2-40B4-BE49-F238E27FC236}">
-                <a16:creationId xmlns:a16="http://schemas.microsoft.com/office/drawing/2014/main" id="{6D50BB81-5EB3-4A55-851D-2AF94DE29C83}"/>
+                <a16:creationId xmlns:a16="http://schemas.microsoft.com/office/drawing/2014/main" id="{8A2EDF95-5577-4A38-B0BB-CA27284E2227}"/>
               </a:ext>
             </a:extLst>
           </p:cNvPr>
@@ -3636,7 +3849,7 @@
           <p:cNvPr id="5" name="Slide Number Placeholder 4">
             <a:extLst xmlns:a="http://schemas.openxmlformats.org/drawingml/2006/main">
               <a:ext uri="{FF2B5EF4-FFF2-40B4-BE49-F238E27FC236}">
-                <a16:creationId xmlns:a16="http://schemas.microsoft.com/office/drawing/2014/main" id="{B2F56DB1-4425-4DE2-AE84-B6E2B9A11F3F}"/>
+                <a16:creationId xmlns:a16="http://schemas.microsoft.com/office/drawing/2014/main" id="{CA79F175-3961-460F-AFC6-A76F097C69EE}"/>
               </a:ext>
             </a:extLst>
           </p:cNvPr>
@@ -3681,7 +3894,7 @@
           <p:cNvPr id="2" name="Date Placeholder 1">
             <a:extLst xmlns:a="http://schemas.openxmlformats.org/drawingml/2006/main">
               <a:ext uri="{FF2B5EF4-FFF2-40B4-BE49-F238E27FC236}">
-                <a16:creationId xmlns:a16="http://schemas.microsoft.com/office/drawing/2014/main" id="{2A200ACD-095E-4654-813D-F18C17C2E6EB}"/>
+                <a16:creationId xmlns:a16="http://schemas.microsoft.com/office/drawing/2014/main" id="{D9807DAC-40B0-4E4F-97E2-B018BB4277CE}"/>
               </a:ext>
             </a:extLst>
           </p:cNvPr>
@@ -3709,7 +3922,7 @@
           <p:cNvPr id="3" name="Footer Placeholder 2">
             <a:extLst xmlns:a="http://schemas.openxmlformats.org/drawingml/2006/main">
               <a:ext uri="{FF2B5EF4-FFF2-40B4-BE49-F238E27FC236}">
-                <a16:creationId xmlns:a16="http://schemas.microsoft.com/office/drawing/2014/main" id="{9CB67FA6-6F70-4A86-AD43-44A07E611F18}"/>
+                <a16:creationId xmlns:a16="http://schemas.microsoft.com/office/drawing/2014/main" id="{DE35D687-F416-44BC-A660-12945C6070E0}"/>
               </a:ext>
             </a:extLst>
           </p:cNvPr>
@@ -3734,7 +3947,7 @@
           <p:cNvPr id="4" name="Slide Number Placeholder 3">
             <a:extLst xmlns:a="http://schemas.openxmlformats.org/drawingml/2006/main">
               <a:ext uri="{FF2B5EF4-FFF2-40B4-BE49-F238E27FC236}">
-                <a16:creationId xmlns:a16="http://schemas.microsoft.com/office/drawing/2014/main" id="{F37053B0-A6B7-4F4A-B5C6-BA1F54781D4B}"/>
+                <a16:creationId xmlns:a16="http://schemas.microsoft.com/office/drawing/2014/main" id="{49FD9A02-9B7A-4EA1-BF3C-B3761E533C01}"/>
               </a:ext>
             </a:extLst>
           </p:cNvPr>
@@ -3779,7 +3992,7 @@
           <p:cNvPr id="2" name="Title 1">
             <a:extLst xmlns:a="http://schemas.openxmlformats.org/drawingml/2006/main">
               <a:ext uri="{FF2B5EF4-FFF2-40B4-BE49-F238E27FC236}">
-                <a16:creationId xmlns:a16="http://schemas.microsoft.com/office/drawing/2014/main" id="{6130ABEA-E8C8-43C4-AB52-AB988E758399}"/>
+                <a16:creationId xmlns:a16="http://schemas.microsoft.com/office/drawing/2014/main" id="{55726571-6FE7-465E-A5F2-77F972E46008}"/>
               </a:ext>
             </a:extLst>
           </p:cNvPr>
@@ -3816,7 +4029,7 @@
           <p:cNvPr id="3" name="Content Placeholder 2">
             <a:extLst xmlns:a="http://schemas.openxmlformats.org/drawingml/2006/main">
               <a:ext uri="{FF2B5EF4-FFF2-40B4-BE49-F238E27FC236}">
-                <a16:creationId xmlns:a16="http://schemas.microsoft.com/office/drawing/2014/main" id="{ACB5457E-2570-47CF-B54B-A1C4A944D618}"/>
+                <a16:creationId xmlns:a16="http://schemas.microsoft.com/office/drawing/2014/main" id="{284F6E28-5802-45F1-BF55-557168EA7A37}"/>
               </a:ext>
             </a:extLst>
           </p:cNvPr>
@@ -3920,7 +4133,7 @@
           <p:cNvPr id="4" name="Text Placeholder 3">
             <a:extLst xmlns:a="http://schemas.openxmlformats.org/drawingml/2006/main">
               <a:ext uri="{FF2B5EF4-FFF2-40B4-BE49-F238E27FC236}">
-                <a16:creationId xmlns:a16="http://schemas.microsoft.com/office/drawing/2014/main" id="{C821E3F1-384A-404F-B12D-EEFC3BAAA445}"/>
+                <a16:creationId xmlns:a16="http://schemas.microsoft.com/office/drawing/2014/main" id="{B5878E18-2FCB-4471-9B12-418DD286DB7B}"/>
               </a:ext>
             </a:extLst>
           </p:cNvPr>
@@ -3992,7 +4205,7 @@
           <p:cNvPr id="5" name="Date Placeholder 4">
             <a:extLst xmlns:a="http://schemas.openxmlformats.org/drawingml/2006/main">
               <a:ext uri="{FF2B5EF4-FFF2-40B4-BE49-F238E27FC236}">
-                <a16:creationId xmlns:a16="http://schemas.microsoft.com/office/drawing/2014/main" id="{51700FDE-C011-4BA0-8AA2-069EE40C30C9}"/>
+                <a16:creationId xmlns:a16="http://schemas.microsoft.com/office/drawing/2014/main" id="{A8E98FB1-83BE-40E0-A67C-7B27998B6445}"/>
               </a:ext>
             </a:extLst>
           </p:cNvPr>
@@ -4020,7 +4233,7 @@
           <p:cNvPr id="6" name="Footer Placeholder 5">
             <a:extLst xmlns:a="http://schemas.openxmlformats.org/drawingml/2006/main">
               <a:ext uri="{FF2B5EF4-FFF2-40B4-BE49-F238E27FC236}">
-                <a16:creationId xmlns:a16="http://schemas.microsoft.com/office/drawing/2014/main" id="{338DCBC1-6363-49A6-9DB4-391895C33934}"/>
+                <a16:creationId xmlns:a16="http://schemas.microsoft.com/office/drawing/2014/main" id="{6ABB9DD8-836B-42D7-AEB8-D8CE10C44BB0}"/>
               </a:ext>
             </a:extLst>
           </p:cNvPr>
@@ -4045,7 +4258,7 @@
           <p:cNvPr id="7" name="Slide Number Placeholder 6">
             <a:extLst xmlns:a="http://schemas.openxmlformats.org/drawingml/2006/main">
               <a:ext uri="{FF2B5EF4-FFF2-40B4-BE49-F238E27FC236}">
-                <a16:creationId xmlns:a16="http://schemas.microsoft.com/office/drawing/2014/main" id="{B9518F37-22E3-4DBF-8E1F-5759B0925608}"/>
+                <a16:creationId xmlns:a16="http://schemas.microsoft.com/office/drawing/2014/main" id="{C732788B-D027-4829-AC13-B9D79563FA68}"/>
               </a:ext>
             </a:extLst>
           </p:cNvPr>
@@ -4090,7 +4303,7 @@
           <p:cNvPr id="2" name="Title 1">
             <a:extLst xmlns:a="http://schemas.openxmlformats.org/drawingml/2006/main">
               <a:ext uri="{FF2B5EF4-FFF2-40B4-BE49-F238E27FC236}">
-                <a16:creationId xmlns:a16="http://schemas.microsoft.com/office/drawing/2014/main" id="{5F12E601-684C-4749-8644-0A235903AD65}"/>
+                <a16:creationId xmlns:a16="http://schemas.microsoft.com/office/drawing/2014/main" id="{498A55E2-250F-4017-AE5B-BD9A9CE62253}"/>
               </a:ext>
             </a:extLst>
           </p:cNvPr>
@@ -4127,7 +4340,7 @@
           <p:cNvPr id="3" name="Picture Placeholder 2">
             <a:extLst xmlns:a="http://schemas.openxmlformats.org/drawingml/2006/main">
               <a:ext uri="{FF2B5EF4-FFF2-40B4-BE49-F238E27FC236}">
-                <a16:creationId xmlns:a16="http://schemas.microsoft.com/office/drawing/2014/main" id="{61E6BD52-DD74-4532-8701-1039C4B69361}"/>
+                <a16:creationId xmlns:a16="http://schemas.microsoft.com/office/drawing/2014/main" id="{C448B72F-9CA4-4190-8A7E-C20E5E6FFC72}"/>
               </a:ext>
             </a:extLst>
           </p:cNvPr>
@@ -4196,7 +4409,7 @@
           <p:cNvPr id="4" name="Text Placeholder 3">
             <a:extLst xmlns:a="http://schemas.openxmlformats.org/drawingml/2006/main">
               <a:ext uri="{FF2B5EF4-FFF2-40B4-BE49-F238E27FC236}">
-                <a16:creationId xmlns:a16="http://schemas.microsoft.com/office/drawing/2014/main" id="{5A368AF9-D6A1-41B7-8755-10658DD5D140}"/>
+                <a16:creationId xmlns:a16="http://schemas.microsoft.com/office/drawing/2014/main" id="{72031900-5BB0-43C3-BC58-1ABF5A4F0D62}"/>
               </a:ext>
             </a:extLst>
           </p:cNvPr>
@@ -4268,7 +4481,7 @@
           <p:cNvPr id="5" name="Date Placeholder 4">
             <a:extLst xmlns:a="http://schemas.openxmlformats.org/drawingml/2006/main">
               <a:ext uri="{FF2B5EF4-FFF2-40B4-BE49-F238E27FC236}">
-                <a16:creationId xmlns:a16="http://schemas.microsoft.com/office/drawing/2014/main" id="{304BC6A4-BB92-4132-9AB6-7E4DA90E0DAA}"/>
+                <a16:creationId xmlns:a16="http://schemas.microsoft.com/office/drawing/2014/main" id="{8D842FB2-A169-4B4F-BAC9-9578F6AD109B}"/>
               </a:ext>
             </a:extLst>
           </p:cNvPr>
@@ -4296,7 +4509,7 @@
           <p:cNvPr id="6" name="Footer Placeholder 5">
             <a:extLst xmlns:a="http://schemas.openxmlformats.org/drawingml/2006/main">
               <a:ext uri="{FF2B5EF4-FFF2-40B4-BE49-F238E27FC236}">
-                <a16:creationId xmlns:a16="http://schemas.microsoft.com/office/drawing/2014/main" id="{ED185B1B-B8AA-4207-83C9-02558FE61BA2}"/>
+                <a16:creationId xmlns:a16="http://schemas.microsoft.com/office/drawing/2014/main" id="{DDBF85AB-F1CC-4AAB-83BA-61D4A6347533}"/>
               </a:ext>
             </a:extLst>
           </p:cNvPr>
@@ -4321,7 +4534,7 @@
           <p:cNvPr id="7" name="Slide Number Placeholder 6">
             <a:extLst xmlns:a="http://schemas.openxmlformats.org/drawingml/2006/main">
               <a:ext uri="{FF2B5EF4-FFF2-40B4-BE49-F238E27FC236}">
-                <a16:creationId xmlns:a16="http://schemas.microsoft.com/office/drawing/2014/main" id="{C048776C-663F-4285-9BE2-AD94C14412A5}"/>
+                <a16:creationId xmlns:a16="http://schemas.microsoft.com/office/drawing/2014/main" id="{075B7080-A384-4F93-B340-8D291B86B8A8}"/>
               </a:ext>
             </a:extLst>
           </p:cNvPr>
@@ -4371,7 +4584,7 @@
           <p:cNvPr id="2" name="Title Placeholder 1">
             <a:extLst xmlns:a="http://schemas.openxmlformats.org/drawingml/2006/main">
               <a:ext uri="{FF2B5EF4-FFF2-40B4-BE49-F238E27FC236}">
-                <a16:creationId xmlns:a16="http://schemas.microsoft.com/office/drawing/2014/main" id="{F1066309-2536-4900-AFA4-163708ACCDD8}"/>
+                <a16:creationId xmlns:a16="http://schemas.microsoft.com/office/drawing/2014/main" id="{F4DB537E-53F7-474B-A645-7BFA74F887D5}"/>
               </a:ext>
             </a:extLst>
           </p:cNvPr>
@@ -4406,7 +4619,7 @@
           <p:cNvPr id="3" name="Text Placeholder 2">
             <a:extLst xmlns:a="http://schemas.openxmlformats.org/drawingml/2006/main">
               <a:ext uri="{FF2B5EF4-FFF2-40B4-BE49-F238E27FC236}">
-                <a16:creationId xmlns:a16="http://schemas.microsoft.com/office/drawing/2014/main" id="{77D62222-898B-4B0C-98A0-EE80B620B4D9}"/>
+                <a16:creationId xmlns:a16="http://schemas.microsoft.com/office/drawing/2014/main" id="{A0D3FEF5-C910-4B6D-A5D4-487B4961C94A}"/>
               </a:ext>
             </a:extLst>
           </p:cNvPr>
@@ -4479,7 +4692,7 @@
           <p:cNvPr id="4" name="Date Placeholder 3">
             <a:extLst xmlns:a="http://schemas.openxmlformats.org/drawingml/2006/main">
               <a:ext uri="{FF2B5EF4-FFF2-40B4-BE49-F238E27FC236}">
-                <a16:creationId xmlns:a16="http://schemas.microsoft.com/office/drawing/2014/main" id="{0CCFAED7-A262-412A-AFD6-0EE35DC74C3D}"/>
+                <a16:creationId xmlns:a16="http://schemas.microsoft.com/office/drawing/2014/main" id="{A375DDE6-AD8F-4918-B85D-520234CFA820}"/>
               </a:ext>
             </a:extLst>
           </p:cNvPr>
@@ -4526,7 +4739,7 @@
           <p:cNvPr id="5" name="Footer Placeholder 4">
             <a:extLst xmlns:a="http://schemas.openxmlformats.org/drawingml/2006/main">
               <a:ext uri="{FF2B5EF4-FFF2-40B4-BE49-F238E27FC236}">
-                <a16:creationId xmlns:a16="http://schemas.microsoft.com/office/drawing/2014/main" id="{C8A4F232-6A6E-4F7B-BFD9-1E02F40224F2}"/>
+                <a16:creationId xmlns:a16="http://schemas.microsoft.com/office/drawing/2014/main" id="{D58FFE86-4FF6-4743-8624-334A57353D2C}"/>
               </a:ext>
             </a:extLst>
           </p:cNvPr>
@@ -4570,7 +4783,7 @@
           <p:cNvPr id="6" name="Slide Number Placeholder 5">
             <a:extLst xmlns:a="http://schemas.openxmlformats.org/drawingml/2006/main">
               <a:ext uri="{FF2B5EF4-FFF2-40B4-BE49-F238E27FC236}">
-                <a16:creationId xmlns:a16="http://schemas.microsoft.com/office/drawing/2014/main" id="{5EA0FA93-390B-486E-9719-20868AF16F8A}"/>
+                <a16:creationId xmlns:a16="http://schemas.microsoft.com/office/drawing/2014/main" id="{AB6CC9F7-BA6D-411E-B620-7ED646A12AD5}"/>
               </a:ext>
             </a:extLst>
           </p:cNvPr>
@@ -4617,7 +4830,7 @@
           <p:cNvPr id="11" name="Picture 10">
             <a:extLst xmlns:a="http://schemas.openxmlformats.org/drawingml/2006/main">
               <a:ext uri="{FF2B5EF4-FFF2-40B4-BE49-F238E27FC236}">
-                <a16:creationId xmlns:a16="http://schemas.microsoft.com/office/drawing/2014/main" id="{6FD9E5B2-4651-4798-AAFA-35CA4C2C6DF6}"/>
+                <a16:creationId xmlns:a16="http://schemas.microsoft.com/office/drawing/2014/main" id="{E8D15F62-08F4-4BC4-8637-1878879038DD}"/>
               </a:ext>
             </a:extLst>
           </p:cNvPr>
@@ -4627,7 +4840,7 @@
           <p:nvPr/>
         </p:nvPicPr>
         <p:blipFill>
-          <a:blip xmlns:r="http://schemas.openxmlformats.org/officeDocument/2006/relationships" xmlns:a="http://schemas.openxmlformats.org/drawingml/2006/main" r:embed="Ra3dc418f690441ac"/>
+          <a:blip xmlns:r="http://schemas.openxmlformats.org/officeDocument/2006/relationships" xmlns:a="http://schemas.openxmlformats.org/drawingml/2006/main" r:embed="Rdb07c6c4d76c458a"/>
           <a:stretch xmlns:a="http://schemas.openxmlformats.org/drawingml/2006/main">
             <a:fillRect l="0" t="0" r="0" b="0"/>
           </a:stretch>
@@ -4646,17 +4859,17 @@
   </p:cSld>
   <p:clrMap bg1="lt1" tx1="dk1" bg2="lt2" tx2="dk2" accent1="accent1" accent2="accent2" accent3="accent3" accent4="accent4" accent5="accent5" accent6="accent6" hlink="hlink" folHlink="folHlink"/>
   <p:sldLayoutIdLst>
-    <p:sldLayoutId xmlns:r="http://schemas.openxmlformats.org/officeDocument/2006/relationships" id="2147483649" r:id="R105ad28995fd48ef"/>
-    <p:sldLayoutId xmlns:r="http://schemas.openxmlformats.org/officeDocument/2006/relationships" id="2147483650" r:id="R712eaf06896f4f74"/>
-    <p:sldLayoutId xmlns:r="http://schemas.openxmlformats.org/officeDocument/2006/relationships" id="2147483651" r:id="R8fbc82bbac604c80"/>
-    <p:sldLayoutId xmlns:r="http://schemas.openxmlformats.org/officeDocument/2006/relationships" id="2147483652" r:id="R7f8f9c0b5dc94d6f"/>
-    <p:sldLayoutId xmlns:r="http://schemas.openxmlformats.org/officeDocument/2006/relationships" id="2147483653" r:id="Rd59903b588524ea5"/>
-    <p:sldLayoutId xmlns:r="http://schemas.openxmlformats.org/officeDocument/2006/relationships" id="2147483654" r:id="R6745dad05e554c1e"/>
-    <p:sldLayoutId xmlns:r="http://schemas.openxmlformats.org/officeDocument/2006/relationships" id="2147483655" r:id="Ree1c4cc77f2146e6"/>
-    <p:sldLayoutId xmlns:r="http://schemas.openxmlformats.org/officeDocument/2006/relationships" id="2147483656" r:id="R615a8106b1114b1b"/>
-    <p:sldLayoutId xmlns:r="http://schemas.openxmlformats.org/officeDocument/2006/relationships" id="2147483657" r:id="R7d8a7c7523da4636"/>
-    <p:sldLayoutId xmlns:r="http://schemas.openxmlformats.org/officeDocument/2006/relationships" id="2147483658" r:id="Ra2680fe5be244484"/>
-    <p:sldLayoutId xmlns:r="http://schemas.openxmlformats.org/officeDocument/2006/relationships" id="2147483659" r:id="Rb8f4bff321c94137"/>
+    <p:sldLayoutId xmlns:r="http://schemas.openxmlformats.org/officeDocument/2006/relationships" id="2147483649" r:id="Raac12dea0eae4a3f"/>
+    <p:sldLayoutId xmlns:r="http://schemas.openxmlformats.org/officeDocument/2006/relationships" id="2147483650" r:id="Rf20dd49ee7674ba8"/>
+    <p:sldLayoutId xmlns:r="http://schemas.openxmlformats.org/officeDocument/2006/relationships" id="2147483651" r:id="Rb9b0c0887cad4241"/>
+    <p:sldLayoutId xmlns:r="http://schemas.openxmlformats.org/officeDocument/2006/relationships" id="2147483652" r:id="R6f479c130ff24805"/>
+    <p:sldLayoutId xmlns:r="http://schemas.openxmlformats.org/officeDocument/2006/relationships" id="2147483653" r:id="Rc139938a626b483a"/>
+    <p:sldLayoutId xmlns:r="http://schemas.openxmlformats.org/officeDocument/2006/relationships" id="2147483654" r:id="Rc10bdab73f7343e3"/>
+    <p:sldLayoutId xmlns:r="http://schemas.openxmlformats.org/officeDocument/2006/relationships" id="2147483655" r:id="R8a00ebecd4d64572"/>
+    <p:sldLayoutId xmlns:r="http://schemas.openxmlformats.org/officeDocument/2006/relationships" id="2147483656" r:id="R5e6dd8f58fd54560"/>
+    <p:sldLayoutId xmlns:r="http://schemas.openxmlformats.org/officeDocument/2006/relationships" id="2147483657" r:id="R83fb3d68fde047d6"/>
+    <p:sldLayoutId xmlns:r="http://schemas.openxmlformats.org/officeDocument/2006/relationships" id="2147483658" r:id="R0897aa4e8e924c42"/>
+    <p:sldLayoutId xmlns:r="http://schemas.openxmlformats.org/officeDocument/2006/relationships" id="2147483659" r:id="Rb77dade1c7694363"/>
   </p:sldLayoutIdLst>
   <p:txStyles>
     <p:titleStyle>
@@ -5280,7 +5493,7 @@
           <p:cNvPr id="2" name="Content Placeholder 2">
             <a:extLst xmlns:a="http://schemas.openxmlformats.org/drawingml/2006/main">
               <a:ext uri="{FF2B5EF4-FFF2-40B4-BE49-F238E27FC236}">
-                <a16:creationId xmlns:a16="http://schemas.microsoft.com/office/drawing/2014/main" id="{9FBA7D2B-DF81-41E9-BF8B-BE74A34B332E}"/>
+                <a16:creationId xmlns:a16="http://schemas.microsoft.com/office/drawing/2014/main" id="{F3E722BD-2581-4903-B938-1D9C34BFD9C8}"/>
               </a:ext>
             </a:extLst>
           </p:cNvPr>
@@ -5300,7 +5513,7 @@
               <a:buNone/>
             </a:pPr>
             <a:r>
-              <a:t>The page has no BOM decision code.</a:t>
+              <a:t>Delete shows a confirmation alert.</a:t>
             </a:r>
           </a:p>
           <a:p xmlns:a="http://schemas.openxmlformats.org/drawingml/2006/main">
@@ -5308,7 +5521,7 @@
               <a:buNone/>
             </a:pPr>
             <a:r>
-              <a:t>All user actions still work.</a:t>
+              <a:t>No leaves the row in place.</a:t>
             </a:r>
           </a:p>
         </p:txBody>
@@ -5341,16 +5554,44 @@
           <a:lstStyle xmlns:a="http://schemas.openxmlformats.org/drawingml/2006/main"/>
           <a:p xmlns:a="http://schemas.openxmlformats.org/drawingml/2006/main">
             <a:r>
-              <a:t>Step 4 Check</a:t>
+              <a:t>Step 3: What changed?</a:t>
             </a:r>
             <a:endParaRPr/>
           </a:p>
         </p:txBody>
       </p:sp>
+      <p:pic>
+        <p:nvPicPr>
+          <p:cNvPr id="4" name="">
+            <a:extLst xmlns:a="http://schemas.openxmlformats.org/drawingml/2006/main">
+              <a:ext uri="{FF2B5EF4-FFF2-40B4-BE49-F238E27FC236}">
+                <a16:creationId xmlns:a16="http://schemas.microsoft.com/office/drawing/2014/main" id="{0B6944B3-CCA4-484C-B411-C3015F37F928}"/>
+              </a:ext>
+            </a:extLst>
+          </p:cNvPr>
+          <p:cNvPicPr>
+            <a:picLocks xmlns:a="http://schemas.openxmlformats.org/drawingml/2006/main" noChangeAspect="1"/>
+          </p:cNvPicPr>
+          <p:nvPr/>
+        </p:nvPicPr>
+        <p:blipFill>
+          <a:blip xmlns:r="http://schemas.openxmlformats.org/officeDocument/2006/relationships" xmlns:a="http://schemas.openxmlformats.org/drawingml/2006/main" r:embed="Ra80e4af1d4ea45d3"/>
+          <a:stretch xmlns:a="http://schemas.openxmlformats.org/drawingml/2006/main"/>
+        </p:blipFill>
+        <p:spPr>
+          <a:xfrm xmlns:a="http://schemas.openxmlformats.org/drawingml/2006/main">
+            <a:off x="3133823" y="3190875"/>
+            <a:ext cx="5924355" cy="3048000"/>
+          </a:xfrm>
+          <a:prstGeom xmlns:a="http://schemas.openxmlformats.org/drawingml/2006/main" prst="rect">
+            <a:avLst/>
+          </a:prstGeom>
+        </p:spPr>
+      </p:pic>
     </p:spTree>
     <p:extLst>
       <p:ext uri="{BB962C8B-B14F-4D97-AF65-F5344CB8AC3E}">
-        <p14:creationId xmlns:p14="http://schemas.microsoft.com/office/powerpoint/2010/main" val="1680859705"/>
+        <p14:creationId xmlns:p14="http://schemas.microsoft.com/office/powerpoint/2010/main" val="779261241"/>
       </p:ext>
     </p:extLst>
   </p:cSld>
@@ -5374,7 +5615,7 @@
           <p:cNvPr id="2" name="Content Placeholder 2">
             <a:extLst xmlns:a="http://schemas.openxmlformats.org/drawingml/2006/main">
               <a:ext uri="{FF2B5EF4-FFF2-40B4-BE49-F238E27FC236}">
-                <a16:creationId xmlns:a16="http://schemas.microsoft.com/office/drawing/2014/main" id="{9FBA7D2B-DF81-41E9-BF8B-BE74A34B332E}"/>
+                <a16:creationId xmlns:a16="http://schemas.microsoft.com/office/drawing/2014/main" id="{F3E722BD-2581-4903-B938-1D9C34BFD9C8}"/>
               </a:ext>
             </a:extLst>
           </p:cNvPr>
@@ -5394,7 +5635,7 @@
               <a:buNone/>
             </a:pPr>
             <a:r>
-              <a:t>Show the completed app workflow.</a:t>
+              <a:t>The BOM view model decides Add, Edit, and Delete.</a:t>
             </a:r>
           </a:p>
           <a:p xmlns:a="http://schemas.openxmlformats.org/drawingml/2006/main">
@@ -5402,15 +5643,7 @@
               <a:buNone/>
             </a:pPr>
             <a:r>
-              <a:t>Explain which responsibility changed.</a:t>
-            </a:r>
-          </a:p>
-          <a:p xmlns:a="http://schemas.openxmlformats.org/drawingml/2006/main">
-            <a:pPr lvl="0">
-              <a:buNone/>
-            </a:pPr>
-            <a:r>
-              <a:t>Check the result before the next module.</a:t>
+              <a:t>The adapter performs UI work.</a:t>
             </a:r>
           </a:p>
         </p:txBody>
@@ -5443,7 +5676,7 @@
           <a:lstStyle xmlns:a="http://schemas.openxmlformats.org/drawingml/2006/main"/>
           <a:p xmlns:a="http://schemas.openxmlformats.org/drawingml/2006/main">
             <a:r>
-              <a:t>Module review</a:t>
+              <a:t>Step 4: BOM decisions</a:t>
             </a:r>
             <a:endParaRPr/>
           </a:p>
@@ -5452,7 +5685,305 @@
     </p:spTree>
     <p:extLst>
       <p:ext uri="{BB962C8B-B14F-4D97-AF65-F5344CB8AC3E}">
-        <p14:creationId xmlns:p14="http://schemas.microsoft.com/office/powerpoint/2010/main" val="1980349057"/>
+        <p14:creationId xmlns:p14="http://schemas.microsoft.com/office/powerpoint/2010/main" val="395973846"/>
+      </p:ext>
+    </p:extLst>
+  </p:cSld>
+</p:sld>
+</file>
+
+<file path=ppt/slides/slide12.xml><?xml version="1.0" encoding="utf-8"?>
+<p:sld xmlns:p="http://schemas.openxmlformats.org/presentationml/2006/main">
+  <p:cSld>
+    <p:spTree>
+      <p:nvGrpSpPr>
+        <p:cNvPr id="1" name=""/>
+        <p:cNvGrpSpPr/>
+        <p:nvPr/>
+      </p:nvGrpSpPr>
+      <p:grpSpPr>
+        <a:xfrm xmlns:a="http://schemas.openxmlformats.org/drawingml/2006/main"/>
+      </p:grpSpPr>
+      <p:sp>
+        <p:nvSpPr>
+          <p:cNvPr id="2" name="Content Placeholder 2">
+            <a:extLst xmlns:a="http://schemas.openxmlformats.org/drawingml/2006/main">
+              <a:ext uri="{FF2B5EF4-FFF2-40B4-BE49-F238E27FC236}">
+                <a16:creationId xmlns:a16="http://schemas.microsoft.com/office/drawing/2014/main" id="{F3E722BD-2581-4903-B938-1D9C34BFD9C8}"/>
+              </a:ext>
+            </a:extLst>
+          </p:cNvPr>
+          <p:cNvSpPr>
+            <a:spLocks xmlns:a="http://schemas.openxmlformats.org/drawingml/2006/main" noGrp="1"/>
+          </p:cNvSpPr>
+          <p:nvPr>
+            <p:ph idx="1"/>
+          </p:nvPr>
+        </p:nvSpPr>
+        <p:spPr/>
+        <p:txBody>
+          <a:bodyPr xmlns:a="http://schemas.openxmlformats.org/drawingml/2006/main"/>
+          <a:lstStyle xmlns:a="http://schemas.openxmlformats.org/drawingml/2006/main"/>
+          <a:p xmlns:a="http://schemas.openxmlformats.org/drawingml/2006/main">
+            <a:pPr lvl="0">
+              <a:buNone/>
+            </a:pPr>
+            <a:r>
+              <a:t>The page has no BOM decision code.</a:t>
+            </a:r>
+          </a:p>
+          <a:p xmlns:a="http://schemas.openxmlformats.org/drawingml/2006/main">
+            <a:pPr lvl="0">
+              <a:buNone/>
+            </a:pPr>
+            <a:r>
+              <a:t>All user actions still work.</a:t>
+            </a:r>
+          </a:p>
+        </p:txBody>
+      </p:sp>
+      <p:sp>
+        <p:nvSpPr>
+          <p:cNvPr id="3" name="Title Placeholder 1">
+            <a:extLst xmlns:a="http://schemas.openxmlformats.org/drawingml/2006/main">
+              <a:ext uri="{FF2B5EF4-FFF2-40B4-BE49-F238E27FC236}">
+                <a16:creationId xmlns:a16="http://schemas.microsoft.com/office/drawing/2014/main" id="{2DF4F548-EDEF-186D-6633-AF1ABC814BC1}"/>
+              </a:ext>
+            </a:extLst>
+          </p:cNvPr>
+          <p:cNvSpPr>
+            <a:spLocks xmlns:a="http://schemas.openxmlformats.org/drawingml/2006/main" noGrp="1"/>
+          </p:cNvSpPr>
+          <p:nvPr>
+            <p:ph type="title" idx="0"/>
+          </p:nvPr>
+        </p:nvSpPr>
+        <p:spPr>
+          <a:prstGeom xmlns:a="http://schemas.openxmlformats.org/drawingml/2006/main" prst="rect">
+            <a:avLst/>
+          </a:prstGeom>
+        </p:spPr>
+        <p:txBody>
+          <a:bodyPr xmlns:a="http://schemas.openxmlformats.org/drawingml/2006/main" vert="horz" lIns="91440" tIns="45720" rIns="91440" bIns="45720" anchor="ctr">
+            <a:normAutofit fontScale="100000"/>
+          </a:bodyPr>
+          <a:lstStyle xmlns:a="http://schemas.openxmlformats.org/drawingml/2006/main"/>
+          <a:p xmlns:a="http://schemas.openxmlformats.org/drawingml/2006/main">
+            <a:r>
+              <a:t>Step 4: What changed?</a:t>
+            </a:r>
+            <a:endParaRPr/>
+          </a:p>
+        </p:txBody>
+      </p:sp>
+    </p:spTree>
+    <p:extLst>
+      <p:ext uri="{BB962C8B-B14F-4D97-AF65-F5344CB8AC3E}">
+        <p14:creationId xmlns:p14="http://schemas.microsoft.com/office/powerpoint/2010/main" val="625285433"/>
+      </p:ext>
+    </p:extLst>
+  </p:cSld>
+</p:sld>
+</file>
+
+<file path=ppt/slides/slide13.xml><?xml version="1.0" encoding="utf-8"?>
+<p:sld xmlns:p="http://schemas.openxmlformats.org/presentationml/2006/main">
+  <p:cSld>
+    <p:spTree>
+      <p:nvGrpSpPr>
+        <p:cNvPr id="1" name=""/>
+        <p:cNvGrpSpPr/>
+        <p:nvPr/>
+      </p:nvGrpSpPr>
+      <p:grpSpPr>
+        <a:xfrm xmlns:a="http://schemas.openxmlformats.org/drawingml/2006/main"/>
+      </p:grpSpPr>
+      <p:sp>
+        <p:nvSpPr>
+          <p:cNvPr id="2" name="Content Placeholder 2">
+            <a:extLst xmlns:a="http://schemas.openxmlformats.org/drawingml/2006/main">
+              <a:ext uri="{FF2B5EF4-FFF2-40B4-BE49-F238E27FC236}">
+                <a16:creationId xmlns:a16="http://schemas.microsoft.com/office/drawing/2014/main" id="{F3E722BD-2581-4903-B938-1D9C34BFD9C8}"/>
+              </a:ext>
+            </a:extLst>
+          </p:cNvPr>
+          <p:cNvSpPr>
+            <a:spLocks xmlns:a="http://schemas.openxmlformats.org/drawingml/2006/main" noGrp="1"/>
+          </p:cNvSpPr>
+          <p:nvPr>
+            <p:ph idx="1"/>
+          </p:nvPr>
+        </p:nvSpPr>
+        <p:spPr/>
+        <p:txBody>
+          <a:bodyPr xmlns:a="http://schemas.openxmlformats.org/drawingml/2006/main"/>
+          <a:lstStyle xmlns:a="http://schemas.openxmlformats.org/drawingml/2006/main"/>
+          <a:p xmlns:a="http://schemas.openxmlformats.org/drawingml/2006/main">
+            <a:pPr lvl="0">
+              <a:buNone/>
+            </a:pPr>
+            <a:r>
+              <a:t>I can identify the UI adapter and its interface.</a:t>
+            </a:r>
+          </a:p>
+          <a:p xmlns:a="http://schemas.openxmlformats.org/drawingml/2006/main">
+            <a:pPr lvl="0">
+              <a:buNone/>
+            </a:pPr>
+            <a:r>
+              <a:t>I can trace Submit and Cancel to different results.</a:t>
+            </a:r>
+          </a:p>
+          <a:p xmlns:a="http://schemas.openxmlformats.org/drawingml/2006/main">
+            <a:pPr lvl="0">
+              <a:buNone/>
+            </a:pPr>
+            <a:r>
+              <a:t>I can test a BOM decision without MAUI controls.</a:t>
+            </a:r>
+          </a:p>
+        </p:txBody>
+      </p:sp>
+      <p:sp>
+        <p:nvSpPr>
+          <p:cNvPr id="3" name="Title Placeholder 1">
+            <a:extLst xmlns:a="http://schemas.openxmlformats.org/drawingml/2006/main">
+              <a:ext uri="{FF2B5EF4-FFF2-40B4-BE49-F238E27FC236}">
+                <a16:creationId xmlns:a16="http://schemas.microsoft.com/office/drawing/2014/main" id="{2DF4F548-EDEF-186D-6633-AF1ABC814BC1}"/>
+              </a:ext>
+            </a:extLst>
+          </p:cNvPr>
+          <p:cNvSpPr>
+            <a:spLocks xmlns:a="http://schemas.openxmlformats.org/drawingml/2006/main" noGrp="1"/>
+          </p:cNvSpPr>
+          <p:nvPr>
+            <p:ph type="title" idx="0"/>
+          </p:nvPr>
+        </p:nvSpPr>
+        <p:spPr>
+          <a:prstGeom xmlns:a="http://schemas.openxmlformats.org/drawingml/2006/main" prst="rect">
+            <a:avLst/>
+          </a:prstGeom>
+        </p:spPr>
+        <p:txBody>
+          <a:bodyPr xmlns:a="http://schemas.openxmlformats.org/drawingml/2006/main" vert="horz" lIns="91440" tIns="45720" rIns="91440" bIns="45720" anchor="ctr">
+            <a:normAutofit fontScale="100000"/>
+          </a:bodyPr>
+          <a:lstStyle xmlns:a="http://schemas.openxmlformats.org/drawingml/2006/main"/>
+          <a:p xmlns:a="http://schemas.openxmlformats.org/drawingml/2006/main">
+            <a:r>
+              <a:t>What you can now explain</a:t>
+            </a:r>
+            <a:endParaRPr/>
+          </a:p>
+        </p:txBody>
+      </p:sp>
+    </p:spTree>
+    <p:extLst>
+      <p:ext uri="{BB962C8B-B14F-4D97-AF65-F5344CB8AC3E}">
+        <p14:creationId xmlns:p14="http://schemas.microsoft.com/office/powerpoint/2010/main" val="374167112"/>
+      </p:ext>
+    </p:extLst>
+  </p:cSld>
+</p:sld>
+</file>
+
+<file path=ppt/slides/slide14.xml><?xml version="1.0" encoding="utf-8"?>
+<p:sld xmlns:p="http://schemas.openxmlformats.org/presentationml/2006/main">
+  <p:cSld>
+    <p:spTree>
+      <p:nvGrpSpPr>
+        <p:cNvPr id="1" name=""/>
+        <p:cNvGrpSpPr/>
+        <p:nvPr/>
+      </p:nvGrpSpPr>
+      <p:grpSpPr>
+        <a:xfrm xmlns:a="http://schemas.openxmlformats.org/drawingml/2006/main"/>
+      </p:grpSpPr>
+      <p:sp>
+        <p:nvSpPr>
+          <p:cNvPr id="2" name="Content Placeholder 2">
+            <a:extLst xmlns:a="http://schemas.openxmlformats.org/drawingml/2006/main">
+              <a:ext uri="{FF2B5EF4-FFF2-40B4-BE49-F238E27FC236}">
+                <a16:creationId xmlns:a16="http://schemas.microsoft.com/office/drawing/2014/main" id="{F3E722BD-2581-4903-B938-1D9C34BFD9C8}"/>
+              </a:ext>
+            </a:extLst>
+          </p:cNvPr>
+          <p:cNvSpPr>
+            <a:spLocks xmlns:a="http://schemas.openxmlformats.org/drawingml/2006/main" noGrp="1"/>
+          </p:cNvSpPr>
+          <p:nvPr>
+            <p:ph idx="1"/>
+          </p:nvPr>
+        </p:nvSpPr>
+        <p:spPr/>
+        <p:txBody>
+          <a:bodyPr xmlns:a="http://schemas.openxmlformats.org/drawingml/2006/main"/>
+          <a:lstStyle xmlns:a="http://schemas.openxmlformats.org/drawingml/2006/main"/>
+          <a:p xmlns:a="http://schemas.openxmlformats.org/drawingml/2006/main">
+            <a:pPr lvl="0">
+              <a:buNone/>
+            </a:pPr>
+            <a:r>
+              <a:t>Dependency injection and MVVM</a:t>
+            </a:r>
+          </a:p>
+          <a:p xmlns:a="http://schemas.openxmlformats.org/drawingml/2006/main">
+            <a:pPr lvl="0">
+              <a:buNone/>
+            </a:pPr>
+            <a:r>
+              <a:t>Search Microsoft Learn for this topic.</a:t>
+            </a:r>
+          </a:p>
+          <a:p xmlns:a="http://schemas.openxmlformats.org/drawingml/2006/main">
+            <a:pPr lvl="0">
+              <a:buNone/>
+            </a:pPr>
+            <a:r>
+              <a:t>Try one example in a small test page.</a:t>
+            </a:r>
+          </a:p>
+        </p:txBody>
+      </p:sp>
+      <p:sp>
+        <p:nvSpPr>
+          <p:cNvPr id="3" name="Title Placeholder 1">
+            <a:extLst xmlns:a="http://schemas.openxmlformats.org/drawingml/2006/main">
+              <a:ext uri="{FF2B5EF4-FFF2-40B4-BE49-F238E27FC236}">
+                <a16:creationId xmlns:a16="http://schemas.microsoft.com/office/drawing/2014/main" id="{2DF4F548-EDEF-186D-6633-AF1ABC814BC1}"/>
+              </a:ext>
+            </a:extLst>
+          </p:cNvPr>
+          <p:cNvSpPr>
+            <a:spLocks xmlns:a="http://schemas.openxmlformats.org/drawingml/2006/main" noGrp="1"/>
+          </p:cNvSpPr>
+          <p:nvPr>
+            <p:ph type="title" idx="0"/>
+          </p:nvPr>
+        </p:nvSpPr>
+        <p:spPr>
+          <a:prstGeom xmlns:a="http://schemas.openxmlformats.org/drawingml/2006/main" prst="rect">
+            <a:avLst/>
+          </a:prstGeom>
+        </p:spPr>
+        <p:txBody>
+          <a:bodyPr xmlns:a="http://schemas.openxmlformats.org/drawingml/2006/main" vert="horz" lIns="91440" tIns="45720" rIns="91440" bIns="45720" anchor="ctr">
+            <a:normAutofit fontScale="100000"/>
+          </a:bodyPr>
+          <a:lstStyle xmlns:a="http://schemas.openxmlformats.org/drawingml/2006/main"/>
+          <a:p xmlns:a="http://schemas.openxmlformats.org/drawingml/2006/main">
+            <a:r>
+              <a:t>Read more in MAUI documentation</a:t>
+            </a:r>
+            <a:endParaRPr/>
+          </a:p>
+        </p:txBody>
+      </p:sp>
+    </p:spTree>
+    <p:extLst>
+      <p:ext uri="{BB962C8B-B14F-4D97-AF65-F5344CB8AC3E}">
+        <p14:creationId xmlns:p14="http://schemas.microsoft.com/office/powerpoint/2010/main" val="1706796716"/>
       </p:ext>
     </p:extLst>
   </p:cSld>
@@ -5476,7 +6007,7 @@
           <p:cNvPr id="2" name="Content Placeholder 2">
             <a:extLst xmlns:a="http://schemas.openxmlformats.org/drawingml/2006/main">
               <a:ext uri="{FF2B5EF4-FFF2-40B4-BE49-F238E27FC236}">
-                <a16:creationId xmlns:a16="http://schemas.microsoft.com/office/drawing/2014/main" id="{9FBA7D2B-DF81-41E9-BF8B-BE74A34B332E}"/>
+                <a16:creationId xmlns:a16="http://schemas.microsoft.com/office/drawing/2014/main" id="{F3E722BD-2581-4903-B938-1D9C34BFD9C8}"/>
               </a:ext>
             </a:extLst>
           </p:cNvPr>
@@ -5545,7 +6076,7 @@
           <a:lstStyle xmlns:a="http://schemas.openxmlformats.org/drawingml/2006/main"/>
           <a:p xmlns:a="http://schemas.openxmlformats.org/drawingml/2006/main">
             <a:r>
-              <a:t>Exercise overview</a:t>
+              <a:t>What you will build</a:t>
             </a:r>
             <a:endParaRPr/>
           </a:p>
@@ -5554,7 +6085,7 @@
     </p:spTree>
     <p:extLst>
       <p:ext uri="{BB962C8B-B14F-4D97-AF65-F5344CB8AC3E}">
-        <p14:creationId xmlns:p14="http://schemas.microsoft.com/office/powerpoint/2010/main" val="1136906824"/>
+        <p14:creationId xmlns:p14="http://schemas.microsoft.com/office/powerpoint/2010/main" val="562635106"/>
       </p:ext>
     </p:extLst>
   </p:cSld>
@@ -5578,7 +6109,7 @@
           <p:cNvPr id="2" name="Content Placeholder 2">
             <a:extLst xmlns:a="http://schemas.openxmlformats.org/drawingml/2006/main">
               <a:ext uri="{FF2B5EF4-FFF2-40B4-BE49-F238E27FC236}">
-                <a16:creationId xmlns:a16="http://schemas.microsoft.com/office/drawing/2014/main" id="{9FBA7D2B-DF81-41E9-BF8B-BE74A34B332E}"/>
+                <a16:creationId xmlns:a16="http://schemas.microsoft.com/office/drawing/2014/main" id="{F3E722BD-2581-4903-B938-1D9C34BFD9C8}"/>
               </a:ext>
             </a:extLst>
           </p:cNvPr>
@@ -5598,7 +6129,7 @@
               <a:buNone/>
             </a:pPr>
             <a:r>
-              <a:t>The container creates the editor view model.</a:t>
+              <a:t>The BOM view model asks an interface for UI work.</a:t>
             </a:r>
           </a:p>
           <a:p xmlns:a="http://schemas.openxmlformats.org/drawingml/2006/main">
@@ -5606,7 +6137,15 @@
               <a:buNone/>
             </a:pPr>
             <a:r>
-              <a:t>The page binds to that injected instance.</a:t>
+              <a:t>A MAUI adapter opens the page or alert.</a:t>
+            </a:r>
+          </a:p>
+          <a:p xmlns:a="http://schemas.openxmlformats.org/drawingml/2006/main">
+            <a:pPr lvl="0">
+              <a:buNone/>
+            </a:pPr>
+            <a:r>
+              <a:t>The result tells the view model what the user chose.</a:t>
             </a:r>
           </a:p>
         </p:txBody>
@@ -5639,16 +6178,44 @@
           <a:lstStyle xmlns:a="http://schemas.openxmlformats.org/drawingml/2006/main"/>
           <a:p xmlns:a="http://schemas.openxmlformats.org/drawingml/2006/main">
             <a:r>
-              <a:t>Step 1 Editor injection</a:t>
+              <a:t>A UI boundary returns a useful result</a:t>
             </a:r>
             <a:endParaRPr/>
           </a:p>
         </p:txBody>
       </p:sp>
+      <p:pic>
+        <p:nvPicPr>
+          <p:cNvPr id="4" name="">
+            <a:extLst xmlns:a="http://schemas.openxmlformats.org/drawingml/2006/main">
+              <a:ext uri="{FF2B5EF4-FFF2-40B4-BE49-F238E27FC236}">
+                <a16:creationId xmlns:a16="http://schemas.microsoft.com/office/drawing/2014/main" id="{3AAE95AB-2A24-45E3-9D7C-1844C935786B}"/>
+              </a:ext>
+            </a:extLst>
+          </p:cNvPr>
+          <p:cNvPicPr>
+            <a:picLocks xmlns:a="http://schemas.openxmlformats.org/drawingml/2006/main" noChangeAspect="1"/>
+          </p:cNvPicPr>
+          <p:nvPr/>
+        </p:nvPicPr>
+        <p:blipFill>
+          <a:blip xmlns:r="http://schemas.openxmlformats.org/officeDocument/2006/relationships" xmlns:a="http://schemas.openxmlformats.org/drawingml/2006/main" r:embed="Rd9618186d7624936"/>
+          <a:stretch xmlns:a="http://schemas.openxmlformats.org/drawingml/2006/main"/>
+        </p:blipFill>
+        <p:spPr>
+          <a:xfrm xmlns:a="http://schemas.openxmlformats.org/drawingml/2006/main">
+            <a:off x="2667000" y="3800475"/>
+            <a:ext cx="6858000" cy="1828800"/>
+          </a:xfrm>
+          <a:prstGeom xmlns:a="http://schemas.openxmlformats.org/drawingml/2006/main" prst="rect">
+            <a:avLst/>
+          </a:prstGeom>
+        </p:spPr>
+      </p:pic>
     </p:spTree>
     <p:extLst>
       <p:ext uri="{BB962C8B-B14F-4D97-AF65-F5344CB8AC3E}">
-        <p14:creationId xmlns:p14="http://schemas.microsoft.com/office/powerpoint/2010/main" val="527607112"/>
+        <p14:creationId xmlns:p14="http://schemas.microsoft.com/office/powerpoint/2010/main" val="1598323899"/>
       </p:ext>
     </p:extLst>
   </p:cSld>
@@ -5672,7 +6239,7 @@
           <p:cNvPr id="2" name="Content Placeholder 2">
             <a:extLst xmlns:a="http://schemas.openxmlformats.org/drawingml/2006/main">
               <a:ext uri="{FF2B5EF4-FFF2-40B4-BE49-F238E27FC236}">
-                <a16:creationId xmlns:a16="http://schemas.microsoft.com/office/drawing/2014/main" id="{9FBA7D2B-DF81-41E9-BF8B-BE74A34B332E}"/>
+                <a16:creationId xmlns:a16="http://schemas.microsoft.com/office/drawing/2014/main" id="{F3E722BD-2581-4903-B938-1D9C34BFD9C8}"/>
               </a:ext>
             </a:extLst>
           </p:cNvPr>
@@ -5692,7 +6259,7 @@
               <a:buNone/>
             </a:pPr>
             <a:r>
-              <a:t>Add starts with an empty editor.</a:t>
+              <a:t>Submit returns an item to the caller.</a:t>
             </a:r>
           </a:p>
           <a:p xmlns:a="http://schemas.openxmlformats.org/drawingml/2006/main">
@@ -5700,7 +6267,15 @@
               <a:buNone/>
             </a:pPr>
             <a:r>
-              <a:t>Edit starts with selected values.</a:t>
+              <a:t>Cancel or Back returns no item.</a:t>
+            </a:r>
+          </a:p>
+          <a:p xmlns:a="http://schemas.openxmlformats.org/drawingml/2006/main">
+            <a:pPr lvl="0">
+              <a:buNone/>
+            </a:pPr>
+            <a:r>
+              <a:t>A test can supply the result without opening a page.</a:t>
             </a:r>
           </a:p>
         </p:txBody>
@@ -5733,44 +6308,16 @@
           <a:lstStyle xmlns:a="http://schemas.openxmlformats.org/drawingml/2006/main"/>
           <a:p xmlns:a="http://schemas.openxmlformats.org/drawingml/2006/main">
             <a:r>
-              <a:t>Step 1 Check</a:t>
+              <a:t>From C# to the screen</a:t>
             </a:r>
             <a:endParaRPr/>
           </a:p>
         </p:txBody>
       </p:sp>
-      <p:pic>
-        <p:nvPicPr>
-          <p:cNvPr id="4" name="">
-            <a:extLst xmlns:a="http://schemas.openxmlformats.org/drawingml/2006/main">
-              <a:ext uri="{FF2B5EF4-FFF2-40B4-BE49-F238E27FC236}">
-                <a16:creationId xmlns:a16="http://schemas.microsoft.com/office/drawing/2014/main" id="{2257155A-C71A-4CFD-BCA7-63AC9CC105C1}"/>
-              </a:ext>
-            </a:extLst>
-          </p:cNvPr>
-          <p:cNvPicPr>
-            <a:picLocks xmlns:a="http://schemas.openxmlformats.org/drawingml/2006/main" noChangeAspect="1"/>
-          </p:cNvPicPr>
-          <p:nvPr/>
-        </p:nvPicPr>
-        <p:blipFill>
-          <a:blip xmlns:r="http://schemas.openxmlformats.org/officeDocument/2006/relationships" xmlns:a="http://schemas.openxmlformats.org/drawingml/2006/main" r:embed="R290fab832dc74863"/>
-          <a:stretch xmlns:a="http://schemas.openxmlformats.org/drawingml/2006/main"/>
-        </p:blipFill>
-        <p:spPr>
-          <a:xfrm xmlns:a="http://schemas.openxmlformats.org/drawingml/2006/main">
-            <a:off x="3133823" y="3190875"/>
-            <a:ext cx="5924355" cy="3048000"/>
-          </a:xfrm>
-          <a:prstGeom xmlns:a="http://schemas.openxmlformats.org/drawingml/2006/main" prst="rect">
-            <a:avLst/>
-          </a:prstGeom>
-        </p:spPr>
-      </p:pic>
     </p:spTree>
     <p:extLst>
       <p:ext uri="{BB962C8B-B14F-4D97-AF65-F5344CB8AC3E}">
-        <p14:creationId xmlns:p14="http://schemas.microsoft.com/office/powerpoint/2010/main" val="748631815"/>
+        <p14:creationId xmlns:p14="http://schemas.microsoft.com/office/powerpoint/2010/main" val="795324322"/>
       </p:ext>
     </p:extLst>
   </p:cSld>
@@ -5794,7 +6341,7 @@
           <p:cNvPr id="2" name="Content Placeholder 2">
             <a:extLst xmlns:a="http://schemas.openxmlformats.org/drawingml/2006/main">
               <a:ext uri="{FF2B5EF4-FFF2-40B4-BE49-F238E27FC236}">
-                <a16:creationId xmlns:a16="http://schemas.microsoft.com/office/drawing/2014/main" id="{9FBA7D2B-DF81-41E9-BF8B-BE74A34B332E}"/>
+                <a16:creationId xmlns:a16="http://schemas.microsoft.com/office/drawing/2014/main" id="{F3E722BD-2581-4903-B938-1D9C34BFD9C8}"/>
               </a:ext>
             </a:extLst>
           </p:cNvPr>
@@ -5814,7 +6361,7 @@
               <a:buNone/>
             </a:pPr>
             <a:r>
-              <a:t>The interface returns an item after Submit.</a:t>
+              <a:t>The container creates the editor view model.</a:t>
             </a:r>
           </a:p>
           <a:p xmlns:a="http://schemas.openxmlformats.org/drawingml/2006/main">
@@ -5822,7 +6369,7 @@
               <a:buNone/>
             </a:pPr>
             <a:r>
-              <a:t>Null means Cancel or Back.</a:t>
+              <a:t>The page binds to that injected instance.</a:t>
             </a:r>
           </a:p>
         </p:txBody>
@@ -5855,7 +6402,7 @@
           <a:lstStyle xmlns:a="http://schemas.openxmlformats.org/drawingml/2006/main"/>
           <a:p xmlns:a="http://schemas.openxmlformats.org/drawingml/2006/main">
             <a:r>
-              <a:t>Step 2 Interaction results</a:t>
+              <a:t>Step 1: Editor injection</a:t>
             </a:r>
             <a:endParaRPr/>
           </a:p>
@@ -5864,7 +6411,7 @@
     </p:spTree>
     <p:extLst>
       <p:ext uri="{BB962C8B-B14F-4D97-AF65-F5344CB8AC3E}">
-        <p14:creationId xmlns:p14="http://schemas.microsoft.com/office/powerpoint/2010/main" val="1544379615"/>
+        <p14:creationId xmlns:p14="http://schemas.microsoft.com/office/powerpoint/2010/main" val="36461796"/>
       </p:ext>
     </p:extLst>
   </p:cSld>
@@ -5888,7 +6435,7 @@
           <p:cNvPr id="2" name="Content Placeholder 2">
             <a:extLst xmlns:a="http://schemas.openxmlformats.org/drawingml/2006/main">
               <a:ext uri="{FF2B5EF4-FFF2-40B4-BE49-F238E27FC236}">
-                <a16:creationId xmlns:a16="http://schemas.microsoft.com/office/drawing/2014/main" id="{9FBA7D2B-DF81-41E9-BF8B-BE74A34B332E}"/>
+                <a16:creationId xmlns:a16="http://schemas.microsoft.com/office/drawing/2014/main" id="{F3E722BD-2581-4903-B938-1D9C34BFD9C8}"/>
               </a:ext>
             </a:extLst>
           </p:cNvPr>
@@ -5908,7 +6455,7 @@
               <a:buNone/>
             </a:pPr>
             <a:r>
-              <a:t>Cancel does not change the BOM.</a:t>
+              <a:t>Add starts with an empty editor.</a:t>
             </a:r>
           </a:p>
           <a:p xmlns:a="http://schemas.openxmlformats.org/drawingml/2006/main">
@@ -5916,7 +6463,7 @@
               <a:buNone/>
             </a:pPr>
             <a:r>
-              <a:t>Submit returns the edited item.</a:t>
+              <a:t>Edit starts with selected values.</a:t>
             </a:r>
           </a:p>
         </p:txBody>
@@ -5949,7 +6496,7 @@
           <a:lstStyle xmlns:a="http://schemas.openxmlformats.org/drawingml/2006/main"/>
           <a:p xmlns:a="http://schemas.openxmlformats.org/drawingml/2006/main">
             <a:r>
-              <a:t>Step 2 Check</a:t>
+              <a:t>Step 1: What changed?</a:t>
             </a:r>
             <a:endParaRPr/>
           </a:p>
@@ -5960,7 +6507,7 @@
           <p:cNvPr id="4" name="">
             <a:extLst xmlns:a="http://schemas.openxmlformats.org/drawingml/2006/main">
               <a:ext uri="{FF2B5EF4-FFF2-40B4-BE49-F238E27FC236}">
-                <a16:creationId xmlns:a16="http://schemas.microsoft.com/office/drawing/2014/main" id="{6595F13C-3698-4695-9640-B33C5F4C809F}"/>
+                <a16:creationId xmlns:a16="http://schemas.microsoft.com/office/drawing/2014/main" id="{D7E5D95F-8CE9-4907-8272-23BBF9F7A084}"/>
               </a:ext>
             </a:extLst>
           </p:cNvPr>
@@ -5970,13 +6517,13 @@
           <p:nvPr/>
         </p:nvPicPr>
         <p:blipFill>
-          <a:blip xmlns:r="http://schemas.openxmlformats.org/officeDocument/2006/relationships" xmlns:a="http://schemas.openxmlformats.org/drawingml/2006/main" r:embed="R42979bb68d3c46a2"/>
+          <a:blip xmlns:r="http://schemas.openxmlformats.org/officeDocument/2006/relationships" xmlns:a="http://schemas.openxmlformats.org/drawingml/2006/main" r:embed="R272e55dcfe264985"/>
           <a:stretch xmlns:a="http://schemas.openxmlformats.org/drawingml/2006/main"/>
         </p:blipFill>
         <p:spPr>
           <a:xfrm xmlns:a="http://schemas.openxmlformats.org/drawingml/2006/main">
-            <a:off x="2667000" y="3800475"/>
-            <a:ext cx="6858000" cy="1828800"/>
+            <a:off x="3133823" y="3190875"/>
+            <a:ext cx="5924355" cy="3048000"/>
           </a:xfrm>
           <a:prstGeom xmlns:a="http://schemas.openxmlformats.org/drawingml/2006/main" prst="rect">
             <a:avLst/>
@@ -5986,7 +6533,7 @@
     </p:spTree>
     <p:extLst>
       <p:ext uri="{BB962C8B-B14F-4D97-AF65-F5344CB8AC3E}">
-        <p14:creationId xmlns:p14="http://schemas.microsoft.com/office/powerpoint/2010/main" val="1952303624"/>
+        <p14:creationId xmlns:p14="http://schemas.microsoft.com/office/powerpoint/2010/main" val="581610527"/>
       </p:ext>
     </p:extLst>
   </p:cSld>
@@ -6010,7 +6557,7 @@
           <p:cNvPr id="2" name="Content Placeholder 2">
             <a:extLst xmlns:a="http://schemas.openxmlformats.org/drawingml/2006/main">
               <a:ext uri="{FF2B5EF4-FFF2-40B4-BE49-F238E27FC236}">
-                <a16:creationId xmlns:a16="http://schemas.microsoft.com/office/drawing/2014/main" id="{9FBA7D2B-DF81-41E9-BF8B-BE74A34B332E}"/>
+                <a16:creationId xmlns:a16="http://schemas.microsoft.com/office/drawing/2014/main" id="{F3E722BD-2581-4903-B938-1D9C34BFD9C8}"/>
               </a:ext>
             </a:extLst>
           </p:cNvPr>
@@ -6030,7 +6577,7 @@
               <a:buNone/>
             </a:pPr>
             <a:r>
-              <a:t>The adapter opens pages and alerts.</a:t>
+              <a:t>The interface returns an item after Submit.</a:t>
             </a:r>
           </a:p>
           <a:p xmlns:a="http://schemas.openxmlformats.org/drawingml/2006/main">
@@ -6038,7 +6585,7 @@
               <a:buNone/>
             </a:pPr>
             <a:r>
-              <a:t>The view model uses its result.</a:t>
+              <a:t>Null means Cancel or Back.</a:t>
             </a:r>
           </a:p>
         </p:txBody>
@@ -6071,7 +6618,7 @@
           <a:lstStyle xmlns:a="http://schemas.openxmlformats.org/drawingml/2006/main"/>
           <a:p xmlns:a="http://schemas.openxmlformats.org/drawingml/2006/main">
             <a:r>
-              <a:t>Step 3 MAUI adapter</a:t>
+              <a:t>Step 2: Interaction results</a:t>
             </a:r>
             <a:endParaRPr/>
           </a:p>
@@ -6080,7 +6627,7 @@
     </p:spTree>
     <p:extLst>
       <p:ext uri="{BB962C8B-B14F-4D97-AF65-F5344CB8AC3E}">
-        <p14:creationId xmlns:p14="http://schemas.microsoft.com/office/powerpoint/2010/main" val="1767337345"/>
+        <p14:creationId xmlns:p14="http://schemas.microsoft.com/office/powerpoint/2010/main" val="937223982"/>
       </p:ext>
     </p:extLst>
   </p:cSld>
@@ -6104,7 +6651,7 @@
           <p:cNvPr id="2" name="Content Placeholder 2">
             <a:extLst xmlns:a="http://schemas.openxmlformats.org/drawingml/2006/main">
               <a:ext uri="{FF2B5EF4-FFF2-40B4-BE49-F238E27FC236}">
-                <a16:creationId xmlns:a16="http://schemas.microsoft.com/office/drawing/2014/main" id="{9FBA7D2B-DF81-41E9-BF8B-BE74A34B332E}"/>
+                <a16:creationId xmlns:a16="http://schemas.microsoft.com/office/drawing/2014/main" id="{F3E722BD-2581-4903-B938-1D9C34BFD9C8}"/>
               </a:ext>
             </a:extLst>
           </p:cNvPr>
@@ -6124,7 +6671,7 @@
               <a:buNone/>
             </a:pPr>
             <a:r>
-              <a:t>Delete shows a confirmation alert.</a:t>
+              <a:t>Cancel does not change the BOM.</a:t>
             </a:r>
           </a:p>
           <a:p xmlns:a="http://schemas.openxmlformats.org/drawingml/2006/main">
@@ -6132,7 +6679,7 @@
               <a:buNone/>
             </a:pPr>
             <a:r>
-              <a:t>No leaves the row in place.</a:t>
+              <a:t>Submit returns the edited item.</a:t>
             </a:r>
           </a:p>
         </p:txBody>
@@ -6165,44 +6712,16 @@
           <a:lstStyle xmlns:a="http://schemas.openxmlformats.org/drawingml/2006/main"/>
           <a:p xmlns:a="http://schemas.openxmlformats.org/drawingml/2006/main">
             <a:r>
-              <a:t>Step 3 Check</a:t>
+              <a:t>Step 2: What changed?</a:t>
             </a:r>
             <a:endParaRPr/>
           </a:p>
         </p:txBody>
       </p:sp>
-      <p:pic>
-        <p:nvPicPr>
-          <p:cNvPr id="4" name="">
-            <a:extLst xmlns:a="http://schemas.openxmlformats.org/drawingml/2006/main">
-              <a:ext uri="{FF2B5EF4-FFF2-40B4-BE49-F238E27FC236}">
-                <a16:creationId xmlns:a16="http://schemas.microsoft.com/office/drawing/2014/main" id="{756E93C8-ADE3-460D-AA1B-D6DA7149D9B7}"/>
-              </a:ext>
-            </a:extLst>
-          </p:cNvPr>
-          <p:cNvPicPr>
-            <a:picLocks xmlns:a="http://schemas.openxmlformats.org/drawingml/2006/main" noChangeAspect="1"/>
-          </p:cNvPicPr>
-          <p:nvPr/>
-        </p:nvPicPr>
-        <p:blipFill>
-          <a:blip xmlns:r="http://schemas.openxmlformats.org/officeDocument/2006/relationships" xmlns:a="http://schemas.openxmlformats.org/drawingml/2006/main" r:embed="R53a6403d1ede4511"/>
-          <a:stretch xmlns:a="http://schemas.openxmlformats.org/drawingml/2006/main"/>
-        </p:blipFill>
-        <p:spPr>
-          <a:xfrm xmlns:a="http://schemas.openxmlformats.org/drawingml/2006/main">
-            <a:off x="3133823" y="3190875"/>
-            <a:ext cx="5924355" cy="3048000"/>
-          </a:xfrm>
-          <a:prstGeom xmlns:a="http://schemas.openxmlformats.org/drawingml/2006/main" prst="rect">
-            <a:avLst/>
-          </a:prstGeom>
-        </p:spPr>
-      </p:pic>
     </p:spTree>
     <p:extLst>
       <p:ext uri="{BB962C8B-B14F-4D97-AF65-F5344CB8AC3E}">
-        <p14:creationId xmlns:p14="http://schemas.microsoft.com/office/powerpoint/2010/main" val="707180398"/>
+        <p14:creationId xmlns:p14="http://schemas.microsoft.com/office/powerpoint/2010/main" val="1639985896"/>
       </p:ext>
     </p:extLst>
   </p:cSld>
@@ -6226,7 +6745,7 @@
           <p:cNvPr id="2" name="Content Placeholder 2">
             <a:extLst xmlns:a="http://schemas.openxmlformats.org/drawingml/2006/main">
               <a:ext uri="{FF2B5EF4-FFF2-40B4-BE49-F238E27FC236}">
-                <a16:creationId xmlns:a16="http://schemas.microsoft.com/office/drawing/2014/main" id="{9FBA7D2B-DF81-41E9-BF8B-BE74A34B332E}"/>
+                <a16:creationId xmlns:a16="http://schemas.microsoft.com/office/drawing/2014/main" id="{F3E722BD-2581-4903-B938-1D9C34BFD9C8}"/>
               </a:ext>
             </a:extLst>
           </p:cNvPr>
@@ -6246,7 +6765,7 @@
               <a:buNone/>
             </a:pPr>
             <a:r>
-              <a:t>The BOM view model decides Add, Edit, and Delete.</a:t>
+              <a:t>The adapter opens pages and alerts.</a:t>
             </a:r>
           </a:p>
           <a:p xmlns:a="http://schemas.openxmlformats.org/drawingml/2006/main">
@@ -6254,7 +6773,7 @@
               <a:buNone/>
             </a:pPr>
             <a:r>
-              <a:t>The adapter performs UI work.</a:t>
+              <a:t>The view model uses its result.</a:t>
             </a:r>
           </a:p>
         </p:txBody>
@@ -6287,7 +6806,7 @@
           <a:lstStyle xmlns:a="http://schemas.openxmlformats.org/drawingml/2006/main"/>
           <a:p xmlns:a="http://schemas.openxmlformats.org/drawingml/2006/main">
             <a:r>
-              <a:t>Step 4 BOM decisions</a:t>
+              <a:t>Step 3: MAUI adapter</a:t>
             </a:r>
             <a:endParaRPr/>
           </a:p>
@@ -6296,7 +6815,7 @@
     </p:spTree>
     <p:extLst>
       <p:ext uri="{BB962C8B-B14F-4D97-AF65-F5344CB8AC3E}">
-        <p14:creationId xmlns:p14="http://schemas.microsoft.com/office/powerpoint/2010/main" val="1394535200"/>
+        <p14:creationId xmlns:p14="http://schemas.microsoft.com/office/powerpoint/2010/main" val="1387206664"/>
       </p:ext>
     </p:extLst>
   </p:cSld>
